--- a/Portofolio-Analisis-Harga-Cabai.pptx
+++ b/Portofolio-Analisis-Harga-Cabai.pptx
@@ -3093,7 +3093,7 @@
     <p:bg>
       <p:bgPr>
         <a:solidFill>
-          <a:srgbClr val="1E3A8A"/>
+          <a:srgbClr val="F7F4EE"/>
         </a:solidFill>
         <a:effectLst/>
       </p:bgPr>
@@ -3107,14 +3107,58 @@
       <p:grpSpPr/>
       <p:sp>
         <p:nvSpPr>
-          <p:cNvPr id="2" name="TextBox 1"/>
+          <p:cNvPr id="2" name="Rectangle 1"/>
+          <p:cNvSpPr/>
+          <p:nvPr/>
+        </p:nvSpPr>
+        <p:spPr>
+          <a:xfrm>
+            <a:off x="0" y="0"/>
+            <a:ext cx="146304" cy="6858000"/>
+          </a:xfrm>
+          <a:prstGeom prst="rect">
+            <a:avLst/>
+          </a:prstGeom>
+          <a:solidFill>
+            <a:srgbClr val="E5322D"/>
+          </a:solidFill>
+          <a:ln>
+            <a:noFill/>
+          </a:ln>
+          <a:effectLst/>
+        </p:spPr>
+        <p:style>
+          <a:lnRef idx="1">
+            <a:schemeClr val="accent1"/>
+          </a:lnRef>
+          <a:fillRef idx="3">
+            <a:schemeClr val="accent1"/>
+          </a:fillRef>
+          <a:effectRef idx="2">
+            <a:schemeClr val="accent1"/>
+          </a:effectRef>
+          <a:fontRef idx="minor">
+            <a:schemeClr val="lt1"/>
+          </a:fontRef>
+        </p:style>
+        <p:txBody>
+          <a:bodyPr rtlCol="0" anchor="ctr"/>
+          <a:lstStyle/>
+          <a:p>
+            <a:pPr algn="ctr"/>
+          </a:p>
+        </p:txBody>
+      </p:sp>
+      <p:sp>
+        <p:nvSpPr>
+          <p:cNvPr id="3" name="TextBox 2"/>
           <p:cNvSpPr txBox="1"/>
           <p:nvPr/>
         </p:nvSpPr>
         <p:spPr>
           <a:xfrm>
-            <a:off x="822960" y="1005840"/>
-            <a:ext cx="10515600" cy="1097280"/>
+            <a:off x="777240" y="868680"/>
+            <a:ext cx="4709160" cy="1691640"/>
           </a:xfrm>
           <a:prstGeom prst="rect">
             <a:avLst/>
@@ -3122,7 +3166,240 @@
           <a:noFill/>
         </p:spPr>
         <p:txBody>
-          <a:bodyPr wrap="square">
+          <a:bodyPr wrap="square" lIns="0" rIns="0" tIns="0" bIns="0">
+            <a:spAutoFit/>
+          </a:bodyPr>
+          <a:lstStyle/>
+          <a:p>
+            <a:pPr>
+              <a:lnSpc>
+                <a:spcPct val="105000"/>
+              </a:lnSpc>
+              <a:spcAft>
+                <a:spcPts val="800"/>
+              </a:spcAft>
+            </a:pPr>
+            <a:r>
+              <a:rPr sz="3700" b="1" i="0">
+                <a:solidFill>
+                  <a:srgbClr val="0B2A44"/>
+                </a:solidFill>
+                <a:latin typeface="Liberation Serif"/>
+              </a:rPr>
+              <a:t>ANALISIS HARGA CABAI INDONESIA 2026</a:t>
+            </a:r>
+          </a:p>
+        </p:txBody>
+      </p:sp>
+      <p:sp>
+        <p:nvSpPr>
+          <p:cNvPr id="4" name="TextBox 3"/>
+          <p:cNvSpPr txBox="1"/>
+          <p:nvPr/>
+        </p:nvSpPr>
+        <p:spPr>
+          <a:xfrm>
+            <a:off x="777240" y="2697480"/>
+            <a:ext cx="4709160" cy="777240"/>
+          </a:xfrm>
+          <a:prstGeom prst="rect">
+            <a:avLst/>
+          </a:prstGeom>
+          <a:noFill/>
+        </p:spPr>
+        <p:txBody>
+          <a:bodyPr wrap="square" lIns="0" rIns="0" tIns="0" bIns="0">
+            <a:spAutoFit/>
+          </a:bodyPr>
+          <a:lstStyle/>
+          <a:p>
+            <a:pPr>
+              <a:lnSpc>
+                <a:spcPct val="115000"/>
+              </a:lnSpc>
+              <a:spcAft>
+                <a:spcPts val="800"/>
+              </a:spcAft>
+            </a:pPr>
+            <a:r>
+              <a:rPr sz="1700" b="1" i="0">
+                <a:solidFill>
+                  <a:srgbClr val="0E4D7A"/>
+                </a:solidFill>
+                <a:latin typeface="Noto Sans"/>
+              </a:rPr>
+              <a:t>Lonjakan Oktober, Volatilitas, dan Disparitas Antar Provinsi</a:t>
+            </a:r>
+          </a:p>
+        </p:txBody>
+      </p:sp>
+      <p:sp>
+        <p:nvSpPr>
+          <p:cNvPr id="5" name="Rectangle 4"/>
+          <p:cNvSpPr/>
+          <p:nvPr/>
+        </p:nvSpPr>
+        <p:spPr>
+          <a:xfrm>
+            <a:off x="795528" y="3584448"/>
+            <a:ext cx="1463040" cy="45720"/>
+          </a:xfrm>
+          <a:prstGeom prst="rect">
+            <a:avLst/>
+          </a:prstGeom>
+          <a:solidFill>
+            <a:srgbClr val="E5322D"/>
+          </a:solidFill>
+          <a:ln>
+            <a:noFill/>
+          </a:ln>
+          <a:effectLst/>
+        </p:spPr>
+        <p:style>
+          <a:lnRef idx="1">
+            <a:schemeClr val="accent1"/>
+          </a:lnRef>
+          <a:fillRef idx="3">
+            <a:schemeClr val="accent1"/>
+          </a:fillRef>
+          <a:effectRef idx="2">
+            <a:schemeClr val="accent1"/>
+          </a:effectRef>
+          <a:fontRef idx="minor">
+            <a:schemeClr val="lt1"/>
+          </a:fontRef>
+        </p:style>
+        <p:txBody>
+          <a:bodyPr rtlCol="0" anchor="ctr"/>
+          <a:lstStyle/>
+          <a:p>
+            <a:pPr algn="ctr"/>
+          </a:p>
+        </p:txBody>
+      </p:sp>
+      <p:sp>
+        <p:nvSpPr>
+          <p:cNvPr id="6" name="TextBox 5"/>
+          <p:cNvSpPr txBox="1"/>
+          <p:nvPr/>
+        </p:nvSpPr>
+        <p:spPr>
+          <a:xfrm>
+            <a:off x="777240" y="3840480"/>
+            <a:ext cx="4709160" cy="1188720"/>
+          </a:xfrm>
+          <a:prstGeom prst="rect">
+            <a:avLst/>
+          </a:prstGeom>
+          <a:noFill/>
+        </p:spPr>
+        <p:txBody>
+          <a:bodyPr wrap="square" lIns="0" rIns="0" tIns="0" bIns="0">
+            <a:spAutoFit/>
+          </a:bodyPr>
+          <a:lstStyle/>
+          <a:p>
+            <a:pPr>
+              <a:lnSpc>
+                <a:spcPct val="120000"/>
+              </a:lnSpc>
+              <a:spcAft>
+                <a:spcPts val="800"/>
+              </a:spcAft>
+            </a:pPr>
+            <a:r>
+              <a:rPr sz="1350" b="0" i="0">
+                <a:solidFill>
+                  <a:srgbClr val="0B2A44"/>
+                </a:solidFill>
+                <a:latin typeface="Noto Sans"/>
+              </a:rPr>
+              <a:t>Data harian PIHPS / Bank Indonesia - 4 komoditas cabai, 34 provinsi, Januari 2025 sampai Oktober 2026</a:t>
+            </a:r>
+          </a:p>
+          <a:p>
+            <a:pPr>
+              <a:lnSpc>
+                <a:spcPct val="120000"/>
+              </a:lnSpc>
+              <a:spcAft>
+                <a:spcPts val="800"/>
+              </a:spcAft>
+            </a:pPr>
+            <a:r>
+              <a:rPr sz="1350" b="0" i="0">
+                <a:solidFill>
+                  <a:srgbClr val="0B2A44"/>
+                </a:solidFill>
+                <a:latin typeface="Noto Sans"/>
+              </a:rPr>
+              <a:t>Plus: paket dashboard Power BI (star schema, DAX, panduan rakit)</a:t>
+            </a:r>
+          </a:p>
+        </p:txBody>
+      </p:sp>
+      <p:sp>
+        <p:nvSpPr>
+          <p:cNvPr id="7" name="Rectangle 6"/>
+          <p:cNvSpPr/>
+          <p:nvPr/>
+        </p:nvSpPr>
+        <p:spPr>
+          <a:xfrm>
+            <a:off x="795528" y="5742432"/>
+            <a:ext cx="4572000" cy="27432"/>
+          </a:xfrm>
+          <a:prstGeom prst="rect">
+            <a:avLst/>
+          </a:prstGeom>
+          <a:solidFill>
+            <a:srgbClr val="0E4D7A"/>
+          </a:solidFill>
+          <a:ln>
+            <a:noFill/>
+          </a:ln>
+          <a:effectLst/>
+        </p:spPr>
+        <p:style>
+          <a:lnRef idx="1">
+            <a:schemeClr val="accent1"/>
+          </a:lnRef>
+          <a:fillRef idx="3">
+            <a:schemeClr val="accent1"/>
+          </a:fillRef>
+          <a:effectRef idx="2">
+            <a:schemeClr val="accent1"/>
+          </a:effectRef>
+          <a:fontRef idx="minor">
+            <a:schemeClr val="lt1"/>
+          </a:fontRef>
+        </p:style>
+        <p:txBody>
+          <a:bodyPr rtlCol="0" anchor="ctr"/>
+          <a:lstStyle/>
+          <a:p>
+            <a:pPr algn="ctr"/>
+          </a:p>
+        </p:txBody>
+      </p:sp>
+      <p:sp>
+        <p:nvSpPr>
+          <p:cNvPr id="8" name="TextBox 7"/>
+          <p:cNvSpPr txBox="1"/>
+          <p:nvPr/>
+        </p:nvSpPr>
+        <p:spPr>
+          <a:xfrm>
+            <a:off x="777240" y="5925312"/>
+            <a:ext cx="4709160" cy="457200"/>
+          </a:xfrm>
+          <a:prstGeom prst="rect">
+            <a:avLst/>
+          </a:prstGeom>
+          <a:noFill/>
+        </p:spPr>
+        <p:txBody>
+          <a:bodyPr wrap="square" lIns="0" rIns="0" tIns="0" bIns="0">
             <a:spAutoFit/>
           </a:bodyPr>
           <a:lstStyle/>
@@ -3133,26 +3410,95 @@
               </a:spcAft>
             </a:pPr>
             <a:r>
-              <a:rPr sz="4000" b="1" i="0">
-                <a:solidFill>
-                  <a:srgbClr val="FFFFFF"/>
-                </a:solidFill>
-              </a:rPr>
-              <a:t>ANALISIS HARGA CABAI INDONESIA 2026</a:t>
-            </a:r>
-          </a:p>
-        </p:txBody>
-      </p:sp>
-      <p:sp>
-        <p:nvSpPr>
-          <p:cNvPr id="3" name="TextBox 2"/>
+              <a:rPr sz="1600" b="1" i="0">
+                <a:solidFill>
+                  <a:srgbClr val="0B2A44"/>
+                </a:solidFill>
+                <a:latin typeface="Noto Sans"/>
+              </a:rPr>
+              <a:t>BAGHIZ ASSHIDDIQIE ARASYA</a:t>
+            </a:r>
+          </a:p>
+        </p:txBody>
+      </p:sp>
+      <p:pic>
+        <p:nvPicPr>
+          <p:cNvPr id="9" name="Picture 8" descr="05_lonjakan_oktober.png"/>
+          <p:cNvPicPr>
+            <a:picLocks noChangeAspect="1"/>
+          </p:cNvPicPr>
+          <p:nvPr/>
+        </p:nvPicPr>
+        <p:blipFill>
+          <a:blip r:embed="rId2"/>
+          <a:stretch>
+            <a:fillRect/>
+          </a:stretch>
+        </p:blipFill>
+        <p:spPr>
+          <a:xfrm>
+            <a:off x="5806440" y="640080"/>
+            <a:ext cx="5806440" cy="2661285"/>
+          </a:xfrm>
+          <a:prstGeom prst="rect">
+            <a:avLst/>
+          </a:prstGeom>
+        </p:spPr>
+      </p:pic>
+      <p:sp>
+        <p:nvSpPr>
+          <p:cNvPr id="10" name="Rectangle 9"/>
+          <p:cNvSpPr/>
+          <p:nvPr/>
+        </p:nvSpPr>
+        <p:spPr>
+          <a:xfrm>
+            <a:off x="5806440" y="3611880"/>
+            <a:ext cx="5806440" cy="2395728"/>
+          </a:xfrm>
+          <a:prstGeom prst="rect">
+            <a:avLst/>
+          </a:prstGeom>
+          <a:solidFill>
+            <a:srgbClr val="0E4D7A"/>
+          </a:solidFill>
+          <a:ln>
+            <a:noFill/>
+          </a:ln>
+          <a:effectLst/>
+        </p:spPr>
+        <p:style>
+          <a:lnRef idx="1">
+            <a:schemeClr val="accent1"/>
+          </a:lnRef>
+          <a:fillRef idx="3">
+            <a:schemeClr val="accent1"/>
+          </a:fillRef>
+          <a:effectRef idx="2">
+            <a:schemeClr val="accent1"/>
+          </a:effectRef>
+          <a:fontRef idx="minor">
+            <a:schemeClr val="lt1"/>
+          </a:fontRef>
+        </p:style>
+        <p:txBody>
+          <a:bodyPr rtlCol="0" anchor="ctr"/>
+          <a:lstStyle/>
+          <a:p>
+            <a:pPr algn="ctr"/>
+          </a:p>
+        </p:txBody>
+      </p:sp>
+      <p:sp>
+        <p:nvSpPr>
+          <p:cNvPr id="11" name="TextBox 10"/>
           <p:cNvSpPr txBox="1"/>
           <p:nvPr/>
         </p:nvSpPr>
         <p:spPr>
           <a:xfrm>
-            <a:off x="822960" y="2286000"/>
-            <a:ext cx="10515600" cy="914400"/>
+            <a:off x="6126480" y="3858768"/>
+            <a:ext cx="5212080" cy="365760"/>
           </a:xfrm>
           <a:prstGeom prst="rect">
             <a:avLst/>
@@ -3160,7 +3506,7 @@
           <a:noFill/>
         </p:spPr>
         <p:txBody>
-          <a:bodyPr wrap="square">
+          <a:bodyPr wrap="square" lIns="0" rIns="0" tIns="0" bIns="0">
             <a:spAutoFit/>
           </a:bodyPr>
           <a:lstStyle/>
@@ -3171,26 +3517,27 @@
               </a:spcAft>
             </a:pPr>
             <a:r>
-              <a:rPr sz="2200" b="0" i="0">
-                <a:solidFill>
-                  <a:srgbClr val="FFFFFF"/>
-                </a:solidFill>
-              </a:rPr>
-              <a:t>Lonjakan Oktober, Volatilitas, dan Disparitas Antar Provinsi</a:t>
-            </a:r>
-          </a:p>
-        </p:txBody>
-      </p:sp>
-      <p:sp>
-        <p:nvSpPr>
-          <p:cNvPr id="4" name="TextBox 3"/>
+              <a:rPr sz="1200" b="1" i="0">
+                <a:solidFill>
+                  <a:srgbClr val="F5C542"/>
+                </a:solidFill>
+                <a:latin typeface="Noto Sans"/>
+              </a:rPr>
+              <a:t>PUNCAK CABAI RAWIT MERAH - 12 OKTOBER 2026</a:t>
+            </a:r>
+          </a:p>
+        </p:txBody>
+      </p:sp>
+      <p:sp>
+        <p:nvSpPr>
+          <p:cNvPr id="12" name="TextBox 11"/>
           <p:cNvSpPr txBox="1"/>
           <p:nvPr/>
         </p:nvSpPr>
         <p:spPr>
           <a:xfrm>
-            <a:off x="822960" y="3474720"/>
-            <a:ext cx="10515600" cy="1828800"/>
+            <a:off x="6126480" y="4187952"/>
+            <a:ext cx="5212080" cy="1143000"/>
           </a:xfrm>
           <a:prstGeom prst="rect">
             <a:avLst/>
@@ -3198,7 +3545,50 @@
           <a:noFill/>
         </p:spPr>
         <p:txBody>
-          <a:bodyPr wrap="square">
+          <a:bodyPr wrap="square" lIns="0" rIns="0" tIns="0" bIns="0">
+            <a:spAutoFit/>
+          </a:bodyPr>
+          <a:lstStyle/>
+          <a:p>
+            <a:r>
+              <a:rPr sz="6300" b="1">
+                <a:solidFill>
+                  <a:srgbClr val="F5C542"/>
+                </a:solidFill>
+                <a:latin typeface="Noto Sans"/>
+              </a:rPr>
+              <a:t>Rp105.300</a:t>
+            </a:r>
+            <a:r>
+              <a:rPr sz="2000" b="1">
+                <a:solidFill>
+                  <a:srgbClr val="F5C542"/>
+                </a:solidFill>
+                <a:latin typeface="Noto Sans"/>
+              </a:rPr>
+              <a:t>/kg</a:t>
+            </a:r>
+          </a:p>
+        </p:txBody>
+      </p:sp>
+      <p:sp>
+        <p:nvSpPr>
+          <p:cNvPr id="13" name="TextBox 12"/>
+          <p:cNvSpPr txBox="1"/>
+          <p:nvPr/>
+        </p:nvSpPr>
+        <p:spPr>
+          <a:xfrm>
+            <a:off x="6126480" y="5440680"/>
+            <a:ext cx="5212080" cy="365760"/>
+          </a:xfrm>
+          <a:prstGeom prst="rect">
+            <a:avLst/>
+          </a:prstGeom>
+          <a:noFill/>
+        </p:spPr>
+        <p:txBody>
+          <a:bodyPr wrap="square" lIns="0" rIns="0" tIns="0" bIns="0">
             <a:spAutoFit/>
           </a:bodyPr>
           <a:lstStyle/>
@@ -3209,65 +3599,13 @@
               </a:spcAft>
             </a:pPr>
             <a:r>
-              <a:rPr sz="1600" b="0" i="0">
+              <a:rPr sz="1250" b="0" i="0">
                 <a:solidFill>
                   <a:srgbClr val="FFFFFF"/>
                 </a:solidFill>
-              </a:rPr>
-              <a:t>Data harian PIHPS / Bank Indonesia — 4 komoditas cabai, 34 provinsi, Januari 2025 sampai Oktober 2026</a:t>
-            </a:r>
-          </a:p>
-          <a:p>
-            <a:pPr>
-              <a:spcAft>
-                <a:spcPts val="800"/>
-              </a:spcAft>
-            </a:pPr>
-            <a:r>
-              <a:rPr sz="1600" b="0" i="0">
-                <a:solidFill>
-                  <a:srgbClr val="FFFFFF"/>
-                </a:solidFill>
-              </a:rPr>
-              <a:t>Plus: paket dashboard Power BI (star schema, DAX, panduan rakit)</a:t>
-            </a:r>
-          </a:p>
-        </p:txBody>
-      </p:sp>
-      <p:sp>
-        <p:nvSpPr>
-          <p:cNvPr id="5" name="TextBox 4"/>
-          <p:cNvSpPr txBox="1"/>
-          <p:nvPr/>
-        </p:nvSpPr>
-        <p:spPr>
-          <a:xfrm>
-            <a:off x="822960" y="5486400"/>
-            <a:ext cx="10515600" cy="731520"/>
-          </a:xfrm>
-          <a:prstGeom prst="rect">
-            <a:avLst/>
-          </a:prstGeom>
-          <a:noFill/>
-        </p:spPr>
-        <p:txBody>
-          <a:bodyPr wrap="square">
-            <a:spAutoFit/>
-          </a:bodyPr>
-          <a:lstStyle/>
-          <a:p>
-            <a:pPr>
-              <a:spcAft>
-                <a:spcPts val="800"/>
-              </a:spcAft>
-            </a:pPr>
-            <a:r>
-              <a:rPr sz="2000" b="1" i="0">
-                <a:solidFill>
-                  <a:srgbClr val="FFFFFF"/>
-                </a:solidFill>
-              </a:rPr>
-              <a:t>BAGHIZ ASSHIDDIQIE ARASYA</a:t>
+                <a:latin typeface="Noto Sans"/>
+              </a:rPr>
+              <a:t>Harga nasional tertinggi Cabai Rawit Merah sepanjang 2026</a:t>
             </a:r>
           </a:p>
         </p:txBody>
@@ -3286,7 +3624,7 @@
     <p:bg>
       <p:bgPr>
         <a:solidFill>
-          <a:srgbClr val="FFFFFF"/>
+          <a:srgbClr val="0E4D7A"/>
         </a:solidFill>
         <a:effectLst/>
       </p:bgPr>
@@ -3300,62 +3638,25 @@
       <p:grpSpPr/>
       <p:sp>
         <p:nvSpPr>
-          <p:cNvPr id="2" name="TextBox 1"/>
-          <p:cNvSpPr txBox="1"/>
-          <p:nvPr/>
-        </p:nvSpPr>
-        <p:spPr>
-          <a:xfrm>
-            <a:off x="640080" y="274320"/>
-            <a:ext cx="10881360" cy="822960"/>
-          </a:xfrm>
-          <a:prstGeom prst="rect">
-            <a:avLst/>
-          </a:prstGeom>
-          <a:noFill/>
-        </p:spPr>
-        <p:txBody>
-          <a:bodyPr wrap="square">
-            <a:spAutoFit/>
-          </a:bodyPr>
-          <a:lstStyle/>
-          <a:p>
-            <a:pPr>
-              <a:spcAft>
-                <a:spcPts val="800"/>
-              </a:spcAft>
-            </a:pPr>
-            <a:r>
-              <a:rPr sz="3000" b="1" i="0">
-                <a:solidFill>
-                  <a:srgbClr val="1E3A8A"/>
-                </a:solidFill>
-              </a:rPr>
-              <a:t>Penutup</a:t>
-            </a:r>
-          </a:p>
-        </p:txBody>
-      </p:sp>
-      <p:sp>
-        <p:nvSpPr>
-          <p:cNvPr id="3" name="Rectangle 2"/>
+          <p:cNvPr id="2" name="Rectangle 1"/>
           <p:cNvSpPr/>
           <p:nvPr/>
         </p:nvSpPr>
         <p:spPr>
           <a:xfrm>
-            <a:off x="640080" y="1051560"/>
-            <a:ext cx="1371600" cy="54864"/>
+            <a:off x="822960" y="777240"/>
+            <a:ext cx="1645920" cy="64008"/>
           </a:xfrm>
           <a:prstGeom prst="rect">
             <a:avLst/>
           </a:prstGeom>
           <a:solidFill>
-            <a:srgbClr val="0D9488"/>
+            <a:srgbClr val="F5C542"/>
           </a:solidFill>
           <a:ln>
             <a:noFill/>
           </a:ln>
+          <a:effectLst/>
         </p:spPr>
         <p:style>
           <a:lnRef idx="1">
@@ -3381,14 +3682,53 @@
       </p:sp>
       <p:sp>
         <p:nvSpPr>
+          <p:cNvPr id="3" name="TextBox 2"/>
+          <p:cNvSpPr txBox="1"/>
+          <p:nvPr/>
+        </p:nvSpPr>
+        <p:spPr>
+          <a:xfrm>
+            <a:off x="822960" y="1005840"/>
+            <a:ext cx="10515600" cy="914400"/>
+          </a:xfrm>
+          <a:prstGeom prst="rect">
+            <a:avLst/>
+          </a:prstGeom>
+          <a:noFill/>
+        </p:spPr>
+        <p:txBody>
+          <a:bodyPr wrap="square" lIns="0" rIns="0" tIns="0" bIns="0">
+            <a:spAutoFit/>
+          </a:bodyPr>
+          <a:lstStyle/>
+          <a:p>
+            <a:pPr>
+              <a:spcAft>
+                <a:spcPts val="800"/>
+              </a:spcAft>
+            </a:pPr>
+            <a:r>
+              <a:rPr sz="4000" b="1" i="0">
+                <a:solidFill>
+                  <a:srgbClr val="FFFFFF"/>
+                </a:solidFill>
+                <a:latin typeface="Liberation Serif"/>
+              </a:rPr>
+              <a:t>Terima kasih.</a:t>
+            </a:r>
+          </a:p>
+        </p:txBody>
+      </p:sp>
+      <p:sp>
+        <p:nvSpPr>
           <p:cNvPr id="4" name="TextBox 3"/>
           <p:cNvSpPr txBox="1"/>
           <p:nvPr/>
         </p:nvSpPr>
         <p:spPr>
           <a:xfrm>
-            <a:off x="640080" y="1371600"/>
-            <a:ext cx="10881360" cy="4754880"/>
+            <a:off x="822960" y="2057400"/>
+            <a:ext cx="10332720" cy="822960"/>
           </a:xfrm>
           <a:prstGeom prst="rect">
             <a:avLst/>
@@ -3396,84 +3736,166 @@
           <a:noFill/>
         </p:spPr>
         <p:txBody>
-          <a:bodyPr wrap="square">
+          <a:bodyPr wrap="square" lIns="0" rIns="0" tIns="0" bIns="0">
             <a:spAutoFit/>
           </a:bodyPr>
           <a:lstStyle/>
           <a:p>
-            <a:pPr marL="171450" indent="-171450">
-              <a:spcBef>
-                <a:spcPts val="200"/>
-              </a:spcBef>
+            <a:pPr>
+              <a:lnSpc>
+                <a:spcPct val="125000"/>
+              </a:lnSpc>
               <a:spcAft>
-                <a:spcPts val="1000"/>
+                <a:spcPts val="800"/>
               </a:spcAft>
-              <a:buChar char="•"/>
             </a:pPr>
             <a:r>
-              <a:rPr sz="1700" b="0" i="0">
-                <a:solidFill>
-                  <a:srgbClr val="1F2937"/>
-                </a:solidFill>
-              </a:rPr>
-              <a:t>Semua angka di deck ini dihitung dari data harian API PIHPS / Bank Indonesia — dapat direproduksi dengan menjalankan scripts/fetch_pihps.py lalu scripts/analyze.py.</a:t>
-            </a:r>
-          </a:p>
-          <a:p>
-            <a:pPr marL="171450" indent="-171450">
-              <a:spcBef>
-                <a:spcPts val="200"/>
-              </a:spcBef>
+              <a:rPr sz="1600" b="0" i="0">
+                <a:solidFill>
+                  <a:srgbClr val="F7F4EE"/>
+                </a:solidFill>
+                <a:latin typeface="Noto Sans"/>
+              </a:rPr>
+              <a:t>Deck ini terbuka untuk didiskusikan. Semua angka di deck ini dihitung dari data harian API PIHPS / Bank Indonesia - dapat direproduksi dengan menjalankan scripts/fetch_pihps.py lalu scripts/analyze.py.</a:t>
+            </a:r>
+          </a:p>
+        </p:txBody>
+      </p:sp>
+      <p:sp>
+        <p:nvSpPr>
+          <p:cNvPr id="5" name="TextBox 4"/>
+          <p:cNvSpPr txBox="1"/>
+          <p:nvPr/>
+        </p:nvSpPr>
+        <p:spPr>
+          <a:xfrm>
+            <a:off x="822960" y="3246120"/>
+            <a:ext cx="10515600" cy="777240"/>
+          </a:xfrm>
+          <a:prstGeom prst="rect">
+            <a:avLst/>
+          </a:prstGeom>
+          <a:noFill/>
+        </p:spPr>
+        <p:txBody>
+          <a:bodyPr wrap="square" lIns="0" rIns="0" tIns="0" bIns="0">
+            <a:spAutoFit/>
+          </a:bodyPr>
+          <a:lstStyle/>
+          <a:p>
+            <a:pPr>
               <a:spcAft>
-                <a:spcPts val="1000"/>
+                <a:spcPts val="800"/>
               </a:spcAft>
-              <a:buChar char="•"/>
             </a:pPr>
             <a:r>
-              <a:rPr sz="1700" b="0" i="0">
-                <a:solidFill>
-                  <a:srgbClr val="1F2937"/>
-                </a:solidFill>
+              <a:rPr sz="3300" b="1" i="0">
+                <a:solidFill>
+                  <a:srgbClr val="F5C542"/>
+                </a:solidFill>
+                <a:latin typeface="Liberation Serif"/>
+              </a:rPr>
+              <a:t>BAGHIZ ASSHIDDIQIE ARASYA</a:t>
+            </a:r>
+          </a:p>
+        </p:txBody>
+      </p:sp>
+      <p:sp>
+        <p:nvSpPr>
+          <p:cNvPr id="6" name="TextBox 5"/>
+          <p:cNvSpPr txBox="1"/>
+          <p:nvPr/>
+        </p:nvSpPr>
+        <p:spPr>
+          <a:xfrm>
+            <a:off x="822960" y="4114800"/>
+            <a:ext cx="10515600" cy="457200"/>
+          </a:xfrm>
+          <a:prstGeom prst="rect">
+            <a:avLst/>
+          </a:prstGeom>
+          <a:noFill/>
+        </p:spPr>
+        <p:txBody>
+          <a:bodyPr wrap="square" lIns="0" rIns="0" tIns="0" bIns="0">
+            <a:spAutoFit/>
+          </a:bodyPr>
+          <a:lstStyle/>
+          <a:p>
+            <a:pPr>
+              <a:spcAft>
+                <a:spcPts val="800"/>
+              </a:spcAft>
+            </a:pPr>
+            <a:r>
+              <a:rPr sz="1600" b="1" i="0">
+                <a:solidFill>
+                  <a:srgbClr val="FFFFFF"/>
+                </a:solidFill>
+                <a:latin typeface="Noto Sans"/>
+              </a:rPr>
+              <a:t>github.com/baghizash/harga-cabai-indonesia-2026</a:t>
+            </a:r>
+          </a:p>
+        </p:txBody>
+      </p:sp>
+      <p:sp>
+        <p:nvSpPr>
+          <p:cNvPr id="7" name="TextBox 6"/>
+          <p:cNvSpPr txBox="1"/>
+          <p:nvPr/>
+        </p:nvSpPr>
+        <p:spPr>
+          <a:xfrm>
+            <a:off x="822960" y="5257800"/>
+            <a:ext cx="10515600" cy="1188720"/>
+          </a:xfrm>
+          <a:prstGeom prst="rect">
+            <a:avLst/>
+          </a:prstGeom>
+          <a:noFill/>
+        </p:spPr>
+        <p:txBody>
+          <a:bodyPr wrap="square" lIns="0" rIns="0" tIns="0" bIns="0">
+            <a:spAutoFit/>
+          </a:bodyPr>
+          <a:lstStyle/>
+          <a:p>
+            <a:pPr>
+              <a:lnSpc>
+                <a:spcPct val="120000"/>
+              </a:lnSpc>
+              <a:spcAft>
+                <a:spcPts val="800"/>
+              </a:spcAft>
+            </a:pPr>
+            <a:r>
+              <a:rPr sz="1150" b="0" i="0">
+                <a:solidFill>
+                  <a:srgbClr val="F7F4EE"/>
+                </a:solidFill>
+                <a:latin typeface="Noto Sans"/>
               </a:rPr>
               <a:t>Struktur proyek: analysis.ipynb, data/raw, sql/queries.sql, scripts, charts, powerbi/ (kit dashboard), findings.json.</a:t>
             </a:r>
           </a:p>
           <a:p>
-            <a:pPr marL="171450" indent="-171450">
-              <a:spcBef>
-                <a:spcPts val="200"/>
-              </a:spcBef>
+            <a:pPr>
+              <a:lnSpc>
+                <a:spcPct val="120000"/>
+              </a:lnSpc>
               <a:spcAft>
-                <a:spcPts val="1000"/>
+                <a:spcPts val="800"/>
               </a:spcAft>
-              <a:buChar char="•"/>
             </a:pPr>
             <a:r>
-              <a:rPr sz="1700" b="0" i="0">
-                <a:solidFill>
-                  <a:srgbClr val="1F2937"/>
-                </a:solidFill>
+              <a:rPr sz="1150" b="0" i="0">
+                <a:solidFill>
+                  <a:srgbClr val="F7F4EE"/>
+                </a:solidFill>
+                <a:latin typeface="Noto Sans"/>
               </a:rPr>
               <a:t>Keterbatasan: PIHPS melaporkan pada hari kerja pasar (bukan setiap hari kalender); beberapa kombinasi provinsi x komoditas tidak dipublikasikan dan dicatat sebagai gap.</a:t>
-            </a:r>
-          </a:p>
-          <a:p>
-            <a:pPr marL="171450" indent="-171450">
-              <a:spcBef>
-                <a:spcPts val="200"/>
-              </a:spcBef>
-              <a:spcAft>
-                <a:spcPts val="1000"/>
-              </a:spcAft>
-              <a:buChar char="•"/>
-            </a:pPr>
-            <a:r>
-              <a:rPr sz="1700" b="0" i="0">
-                <a:solidFill>
-                  <a:srgbClr val="1F2937"/>
-                </a:solidFill>
-              </a:rPr>
-              <a:t>Terima kasih.</a:t>
             </a:r>
           </a:p>
         </p:txBody>
@@ -3492,7 +3914,7 @@
     <p:bg>
       <p:bgPr>
         <a:solidFill>
-          <a:srgbClr val="FFFFFF"/>
+          <a:srgbClr val="F7F4EE"/>
         </a:solidFill>
         <a:effectLst/>
       </p:bgPr>
@@ -3512,8 +3934,8 @@
         </p:nvSpPr>
         <p:spPr>
           <a:xfrm>
-            <a:off x="640080" y="274320"/>
-            <a:ext cx="10881360" cy="822960"/>
+            <a:off x="640080" y="292608"/>
+            <a:ext cx="10908792" cy="777240"/>
           </a:xfrm>
           <a:prstGeom prst="rect">
             <a:avLst/>
@@ -3521,7 +3943,7 @@
           <a:noFill/>
         </p:spPr>
         <p:txBody>
-          <a:bodyPr wrap="square">
+          <a:bodyPr wrap="square" lIns="0" rIns="0" tIns="0" bIns="0">
             <a:spAutoFit/>
           </a:bodyPr>
           <a:lstStyle/>
@@ -3532,10 +3954,11 @@
               </a:spcAft>
             </a:pPr>
             <a:r>
-              <a:rPr sz="3000" b="1" i="0">
-                <a:solidFill>
-                  <a:srgbClr val="1E3A8A"/>
-                </a:solidFill>
+              <a:rPr sz="3100" b="1" i="0">
+                <a:solidFill>
+                  <a:srgbClr val="0B2A44"/>
+                </a:solidFill>
+                <a:latin typeface="Liberation Serif"/>
               </a:rPr>
               <a:t>Kenapa Cabai?</a:t>
             </a:r>
@@ -3550,18 +3973,19 @@
         </p:nvSpPr>
         <p:spPr>
           <a:xfrm>
-            <a:off x="640080" y="1051560"/>
-            <a:ext cx="1371600" cy="54864"/>
+            <a:off x="658368" y="1060704"/>
+            <a:ext cx="2103120" cy="50292"/>
           </a:xfrm>
           <a:prstGeom prst="rect">
             <a:avLst/>
           </a:prstGeom>
           <a:solidFill>
-            <a:srgbClr val="0D9488"/>
+            <a:srgbClr val="E5322D"/>
           </a:solidFill>
           <a:ln>
             <a:noFill/>
           </a:ln>
+          <a:effectLst/>
         </p:spPr>
         <p:style>
           <a:lnRef idx="1">
@@ -3593,8 +4017,8 @@
         </p:nvSpPr>
         <p:spPr>
           <a:xfrm>
-            <a:off x="640080" y="1371600"/>
-            <a:ext cx="10881360" cy="4754880"/>
+            <a:off x="640080" y="1417320"/>
+            <a:ext cx="10908792" cy="3749039"/>
           </a:xfrm>
           <a:prstGeom prst="rect">
             <a:avLst/>
@@ -3602,82 +4026,86 @@
           <a:noFill/>
         </p:spPr>
         <p:txBody>
-          <a:bodyPr wrap="square">
+          <a:bodyPr wrap="square" lIns="0" rIns="0" tIns="0" bIns="0">
             <a:spAutoFit/>
           </a:bodyPr>
           <a:lstStyle/>
           <a:p>
             <a:pPr marL="171450" indent="-171450">
-              <a:spcBef>
-                <a:spcPts val="200"/>
-              </a:spcBef>
+              <a:lnSpc>
+                <a:spcPct val="112000"/>
+              </a:lnSpc>
               <a:spcAft>
-                <a:spcPts val="1000"/>
+                <a:spcPts val="1200"/>
               </a:spcAft>
               <a:buChar char="•"/>
             </a:pPr>
             <a:r>
-              <a:rPr sz="1700" b="0" i="0">
-                <a:solidFill>
-                  <a:srgbClr val="1F2937"/>
-                </a:solidFill>
+              <a:rPr sz="1650" b="0" i="0">
+                <a:solidFill>
+                  <a:srgbClr val="0B2A44"/>
+                </a:solidFill>
+                <a:latin typeface="Noto Sans"/>
               </a:rPr>
               <a:t>Cabai adalah komoditas pangan paling volatile di Indonesia: harganya bisa melonjak puluhan persen dalam hitungan hari dan langsung terasa di inflasi.</a:t>
             </a:r>
           </a:p>
           <a:p>
             <a:pPr marL="171450" indent="-171450">
-              <a:spcBef>
-                <a:spcPts val="200"/>
-              </a:spcBef>
+              <a:lnSpc>
+                <a:spcPct val="112000"/>
+              </a:lnSpc>
               <a:spcAft>
-                <a:spcPts val="1000"/>
+                <a:spcPts val="1200"/>
               </a:spcAft>
               <a:buChar char="•"/>
             </a:pPr>
             <a:r>
-              <a:rPr sz="1700" b="0" i="0">
-                <a:solidFill>
-                  <a:srgbClr val="1F2937"/>
-                </a:solidFill>
+              <a:rPr sz="1650" b="0" i="0">
+                <a:solidFill>
+                  <a:srgbClr val="0B2A44"/>
+                </a:solidFill>
+                <a:latin typeface="Noto Sans"/>
               </a:rPr>
               <a:t>Analisis ini memakai 4 komoditas PIHPS: Cabai Merah Besar, Cabai Merah Keriting, Cabai Rawit Hijau, dan Cabai Rawit Merah.</a:t>
             </a:r>
           </a:p>
           <a:p>
             <a:pPr marL="171450" indent="-171450">
-              <a:spcBef>
-                <a:spcPts val="200"/>
-              </a:spcBef>
+              <a:lnSpc>
+                <a:spcPct val="112000"/>
+              </a:lnSpc>
               <a:spcAft>
-                <a:spcPts val="1000"/>
+                <a:spcPts val="1200"/>
               </a:spcAft>
               <a:buChar char="•"/>
             </a:pPr>
             <a:r>
-              <a:rPr sz="1700" b="0" i="0">
-                <a:solidFill>
-                  <a:srgbClr val="1F2937"/>
-                </a:solidFill>
+              <a:rPr sz="1650" b="0" i="0">
+                <a:solidFill>
+                  <a:srgbClr val="0B2A44"/>
+                </a:solidFill>
+                <a:latin typeface="Noto Sans"/>
               </a:rPr>
               <a:t>Pertanyaan: bagaimana harga bergerak di 2026, cabai mana yang paling liar, di provinsi mana harganya paling mahal, dan seberapa besar lonjakan Oktober 2026?</a:t>
             </a:r>
           </a:p>
           <a:p>
             <a:pPr marL="171450" indent="-171450">
-              <a:spcBef>
-                <a:spcPts val="200"/>
-              </a:spcBef>
+              <a:lnSpc>
+                <a:spcPct val="112000"/>
+              </a:lnSpc>
               <a:spcAft>
-                <a:spcPts val="1000"/>
+                <a:spcPts val="1200"/>
               </a:spcAft>
               <a:buChar char="•"/>
             </a:pPr>
             <a:r>
-              <a:rPr sz="1700" b="0" i="0">
-                <a:solidFill>
-                  <a:srgbClr val="1F2937"/>
-                </a:solidFill>
+              <a:rPr sz="1650" b="0" i="0">
+                <a:solidFill>
+                  <a:srgbClr val="0B2A44"/>
+                </a:solidFill>
+                <a:latin typeface="Noto Sans"/>
               </a:rPr>
               <a:t>Jawaban dicari dari data harian resmi, bukan dari perkiraan.</a:t>
             </a:r>
@@ -3686,14 +4114,58 @@
       </p:sp>
       <p:sp>
         <p:nvSpPr>
-          <p:cNvPr id="5" name="TextBox 4"/>
+          <p:cNvPr id="5" name="Rectangle 4"/>
+          <p:cNvSpPr/>
+          <p:nvPr/>
+        </p:nvSpPr>
+        <p:spPr>
+          <a:xfrm>
+            <a:off x="640080" y="5212080"/>
+            <a:ext cx="10908792" cy="914400"/>
+          </a:xfrm>
+          <a:prstGeom prst="rect">
+            <a:avLst/>
+          </a:prstGeom>
+          <a:solidFill>
+            <a:srgbClr val="F5C542"/>
+          </a:solidFill>
+          <a:ln>
+            <a:noFill/>
+          </a:ln>
+          <a:effectLst/>
+        </p:spPr>
+        <p:style>
+          <a:lnRef idx="1">
+            <a:schemeClr val="accent1"/>
+          </a:lnRef>
+          <a:fillRef idx="3">
+            <a:schemeClr val="accent1"/>
+          </a:fillRef>
+          <a:effectRef idx="2">
+            <a:schemeClr val="accent1"/>
+          </a:effectRef>
+          <a:fontRef idx="minor">
+            <a:schemeClr val="lt1"/>
+          </a:fontRef>
+        </p:style>
+        <p:txBody>
+          <a:bodyPr rtlCol="0" anchor="ctr"/>
+          <a:lstStyle/>
+          <a:p>
+            <a:pPr algn="ctr"/>
+          </a:p>
+        </p:txBody>
+      </p:sp>
+      <p:sp>
+        <p:nvSpPr>
+          <p:cNvPr id="6" name="TextBox 5"/>
           <p:cNvSpPr txBox="1"/>
           <p:nvPr/>
         </p:nvSpPr>
         <p:spPr>
           <a:xfrm>
-            <a:off x="640080" y="6126480"/>
-            <a:ext cx="10881360" cy="457200"/>
+            <a:off x="960120" y="5358384"/>
+            <a:ext cx="3474720" cy="685800"/>
           </a:xfrm>
           <a:prstGeom prst="rect">
             <a:avLst/>
@@ -3701,7 +4173,172 @@
           <a:noFill/>
         </p:spPr>
         <p:txBody>
-          <a:bodyPr wrap="square">
+          <a:bodyPr wrap="square" lIns="0" rIns="0" tIns="0" bIns="0">
+            <a:spAutoFit/>
+          </a:bodyPr>
+          <a:lstStyle/>
+          <a:p>
+            <a:pPr>
+              <a:spcAft>
+                <a:spcPts val="100"/>
+              </a:spcAft>
+            </a:pPr>
+            <a:r>
+              <a:rPr sz="1700" b="1" i="0">
+                <a:solidFill>
+                  <a:srgbClr val="0B2A44"/>
+                </a:solidFill>
+                <a:latin typeface="Noto Sans"/>
+              </a:rPr>
+              <a:t>4</a:t>
+            </a:r>
+          </a:p>
+          <a:p>
+            <a:pPr>
+              <a:spcAft>
+                <a:spcPts val="0"/>
+              </a:spcAft>
+            </a:pPr>
+            <a:r>
+              <a:rPr sz="1150" b="0" i="0">
+                <a:solidFill>
+                  <a:srgbClr val="0B2A44"/>
+                </a:solidFill>
+                <a:latin typeface="Noto Sans"/>
+              </a:rPr>
+              <a:t>komoditas cabai</a:t>
+            </a:r>
+          </a:p>
+        </p:txBody>
+      </p:sp>
+      <p:sp>
+        <p:nvSpPr>
+          <p:cNvPr id="7" name="TextBox 6"/>
+          <p:cNvSpPr txBox="1"/>
+          <p:nvPr/>
+        </p:nvSpPr>
+        <p:spPr>
+          <a:xfrm>
+            <a:off x="4617720" y="5358384"/>
+            <a:ext cx="3474720" cy="685800"/>
+          </a:xfrm>
+          <a:prstGeom prst="rect">
+            <a:avLst/>
+          </a:prstGeom>
+          <a:noFill/>
+        </p:spPr>
+        <p:txBody>
+          <a:bodyPr wrap="square" lIns="0" rIns="0" tIns="0" bIns="0">
+            <a:spAutoFit/>
+          </a:bodyPr>
+          <a:lstStyle/>
+          <a:p>
+            <a:pPr>
+              <a:spcAft>
+                <a:spcPts val="100"/>
+              </a:spcAft>
+            </a:pPr>
+            <a:r>
+              <a:rPr sz="1700" b="1" i="0">
+                <a:solidFill>
+                  <a:srgbClr val="0B2A44"/>
+                </a:solidFill>
+                <a:latin typeface="Noto Sans"/>
+              </a:rPr>
+              <a:t>34</a:t>
+            </a:r>
+          </a:p>
+          <a:p>
+            <a:pPr>
+              <a:spcAft>
+                <a:spcPts val="0"/>
+              </a:spcAft>
+            </a:pPr>
+            <a:r>
+              <a:rPr sz="1150" b="0" i="0">
+                <a:solidFill>
+                  <a:srgbClr val="0B2A44"/>
+                </a:solidFill>
+                <a:latin typeface="Noto Sans"/>
+              </a:rPr>
+              <a:t>provinsi</a:t>
+            </a:r>
+          </a:p>
+        </p:txBody>
+      </p:sp>
+      <p:sp>
+        <p:nvSpPr>
+          <p:cNvPr id="8" name="TextBox 7"/>
+          <p:cNvSpPr txBox="1"/>
+          <p:nvPr/>
+        </p:nvSpPr>
+        <p:spPr>
+          <a:xfrm>
+            <a:off x="8275320" y="5358384"/>
+            <a:ext cx="3474720" cy="685800"/>
+          </a:xfrm>
+          <a:prstGeom prst="rect">
+            <a:avLst/>
+          </a:prstGeom>
+          <a:noFill/>
+        </p:spPr>
+        <p:txBody>
+          <a:bodyPr wrap="square" lIns="0" rIns="0" tIns="0" bIns="0">
+            <a:spAutoFit/>
+          </a:bodyPr>
+          <a:lstStyle/>
+          <a:p>
+            <a:pPr>
+              <a:spcAft>
+                <a:spcPts val="100"/>
+              </a:spcAft>
+            </a:pPr>
+            <a:r>
+              <a:rPr sz="1700" b="1" i="0">
+                <a:solidFill>
+                  <a:srgbClr val="0B2A44"/>
+                </a:solidFill>
+                <a:latin typeface="Noto Sans"/>
+              </a:rPr>
+              <a:t>Jan 2025 - Okt 2026</a:t>
+            </a:r>
+          </a:p>
+          <a:p>
+            <a:pPr>
+              <a:spcAft>
+                <a:spcPts val="0"/>
+              </a:spcAft>
+            </a:pPr>
+            <a:r>
+              <a:rPr sz="1150" b="0" i="0">
+                <a:solidFill>
+                  <a:srgbClr val="0B2A44"/>
+                </a:solidFill>
+                <a:latin typeface="Noto Sans"/>
+              </a:rPr>
+              <a:t>periode data harian</a:t>
+            </a:r>
+          </a:p>
+        </p:txBody>
+      </p:sp>
+      <p:sp>
+        <p:nvSpPr>
+          <p:cNvPr id="9" name="TextBox 8"/>
+          <p:cNvSpPr txBox="1"/>
+          <p:nvPr/>
+        </p:nvSpPr>
+        <p:spPr>
+          <a:xfrm>
+            <a:off x="640080" y="6291072"/>
+            <a:ext cx="10908792" cy="365760"/>
+          </a:xfrm>
+          <a:prstGeom prst="rect">
+            <a:avLst/>
+          </a:prstGeom>
+          <a:noFill/>
+        </p:spPr>
+        <p:txBody>
+          <a:bodyPr wrap="square" lIns="0" rIns="0" tIns="0" bIns="0">
             <a:spAutoFit/>
           </a:bodyPr>
           <a:lstStyle/>
@@ -3712,10 +4349,11 @@
               </a:spcAft>
             </a:pPr>
             <a:r>
-              <a:rPr sz="1100" b="0" i="1">
-                <a:solidFill>
-                  <a:srgbClr val="6B7280"/>
-                </a:solidFill>
+              <a:rPr sz="1150" b="0" i="1">
+                <a:solidFill>
+                  <a:srgbClr val="0E4D7A"/>
+                </a:solidFill>
+                <a:latin typeface="Noto Sans"/>
               </a:rPr>
               <a:t>Sumber data: API publik PIHPS / Bank Indonesia (hargapangan.id), Pasar Tradisional.</a:t>
             </a:r>
@@ -3736,7 +4374,7 @@
     <p:bg>
       <p:bgPr>
         <a:solidFill>
-          <a:srgbClr val="FFFFFF"/>
+          <a:srgbClr val="F7F4EE"/>
         </a:solidFill>
         <a:effectLst/>
       </p:bgPr>
@@ -3756,8 +4394,8 @@
         </p:nvSpPr>
         <p:spPr>
           <a:xfrm>
-            <a:off x="640080" y="274320"/>
-            <a:ext cx="10881360" cy="822960"/>
+            <a:off x="640080" y="292608"/>
+            <a:ext cx="10908792" cy="777240"/>
           </a:xfrm>
           <a:prstGeom prst="rect">
             <a:avLst/>
@@ -3765,7 +4403,7 @@
           <a:noFill/>
         </p:spPr>
         <p:txBody>
-          <a:bodyPr wrap="square">
+          <a:bodyPr wrap="square" lIns="0" rIns="0" tIns="0" bIns="0">
             <a:spAutoFit/>
           </a:bodyPr>
           <a:lstStyle/>
@@ -3776,10 +4414,11 @@
               </a:spcAft>
             </a:pPr>
             <a:r>
-              <a:rPr sz="3000" b="1" i="0">
-                <a:solidFill>
-                  <a:srgbClr val="1E3A8A"/>
-                </a:solidFill>
+              <a:rPr sz="3100" b="1" i="0">
+                <a:solidFill>
+                  <a:srgbClr val="0B2A44"/>
+                </a:solidFill>
+                <a:latin typeface="Liberation Serif"/>
               </a:rPr>
               <a:t>Data dan Metode</a:t>
             </a:r>
@@ -3794,18 +4433,19 @@
         </p:nvSpPr>
         <p:spPr>
           <a:xfrm>
-            <a:off x="640080" y="1051560"/>
-            <a:ext cx="1371600" cy="54864"/>
+            <a:off x="658368" y="1060704"/>
+            <a:ext cx="2103120" cy="50292"/>
           </a:xfrm>
           <a:prstGeom prst="rect">
             <a:avLst/>
           </a:prstGeom>
           <a:solidFill>
-            <a:srgbClr val="0D9488"/>
+            <a:srgbClr val="E5322D"/>
           </a:solidFill>
           <a:ln>
             <a:noFill/>
           </a:ln>
+          <a:effectLst/>
         </p:spPr>
         <p:style>
           <a:lnRef idx="1">
@@ -3837,8 +4477,8 @@
         </p:nvSpPr>
         <p:spPr>
           <a:xfrm>
-            <a:off x="640080" y="1371600"/>
-            <a:ext cx="10881360" cy="4754880"/>
+            <a:off x="640080" y="1417320"/>
+            <a:ext cx="6583680" cy="4754880"/>
           </a:xfrm>
           <a:prstGeom prst="rect">
             <a:avLst/>
@@ -3846,84 +4486,283 @@
           <a:noFill/>
         </p:spPr>
         <p:txBody>
-          <a:bodyPr wrap="square">
+          <a:bodyPr wrap="square" lIns="0" rIns="0" tIns="0" bIns="0">
             <a:spAutoFit/>
           </a:bodyPr>
           <a:lstStyle/>
           <a:p>
             <a:pPr marL="171450" indent="-171450">
-              <a:spcBef>
-                <a:spcPts val="200"/>
-              </a:spcBef>
+              <a:lnSpc>
+                <a:spcPct val="112000"/>
+              </a:lnSpc>
               <a:spcAft>
-                <a:spcPts val="1000"/>
+                <a:spcPts val="1200"/>
               </a:spcAft>
               <a:buChar char="•"/>
             </a:pPr>
             <a:r>
-              <a:rPr sz="1700" b="0" i="0">
-                <a:solidFill>
-                  <a:srgbClr val="1F2937"/>
-                </a:solidFill>
+              <a:rPr sz="1600" b="0" i="0">
+                <a:solidFill>
+                  <a:srgbClr val="0B2A44"/>
+                </a:solidFill>
+                <a:latin typeface="Noto Sans"/>
               </a:rPr>
               <a:t>Data harian API PIHPS: 2025-01-01 sampai 2026-10-16, 1,872 baris nasional + 59,436 baris provinsi (58,253 dengan harga).</a:t>
             </a:r>
           </a:p>
           <a:p>
             <a:pPr marL="171450" indent="-171450">
-              <a:spcBef>
-                <a:spcPts val="200"/>
-              </a:spcBef>
+              <a:lnSpc>
+                <a:spcPct val="112000"/>
+              </a:lnSpc>
               <a:spcAft>
-                <a:spcPts val="1000"/>
+                <a:spcPts val="1200"/>
               </a:spcAft>
               <a:buChar char="•"/>
             </a:pPr>
             <a:r>
-              <a:rPr sz="1700" b="0" i="0">
-                <a:solidFill>
-                  <a:srgbClr val="1F2937"/>
-                </a:solidFill>
+              <a:rPr sz="1600" b="0" i="0">
+                <a:solidFill>
+                  <a:srgbClr val="0B2A44"/>
+                </a:solidFill>
+                <a:latin typeface="Noto Sans"/>
               </a:rPr>
               <a:t>Setiap pertanyaan dijawab dengan query SQL (sql/queries.sql) dan divisualisasikan dalam 10 chart dari data yang sama.</a:t>
             </a:r>
           </a:p>
           <a:p>
             <a:pPr marL="171450" indent="-171450">
-              <a:spcBef>
-                <a:spcPts val="200"/>
-              </a:spcBef>
+              <a:lnSpc>
+                <a:spcPct val="112000"/>
+              </a:lnSpc>
               <a:spcAft>
-                <a:spcPts val="1000"/>
+                <a:spcPts val="1200"/>
               </a:spcAft>
               <a:buChar char="•"/>
             </a:pPr>
             <a:r>
-              <a:rPr sz="1700" b="0" i="0">
-                <a:solidFill>
-                  <a:srgbClr val="1F2937"/>
-                </a:solidFill>
+              <a:rPr sz="1600" b="0" i="0">
+                <a:solidFill>
+                  <a:srgbClr val="0B2A44"/>
+                </a:solidFill>
+                <a:latin typeface="Noto Sans"/>
               </a:rPr>
               <a:t>Untuk Power BI, data disusun ulang menjadi star schema: 1 tabel fakta + 3 tabel dimensi, lengkap dengan measure DAX dan panduan merakit dashboard.</a:t>
             </a:r>
           </a:p>
           <a:p>
             <a:pPr marL="171450" indent="-171450">
-              <a:spcBef>
-                <a:spcPts val="200"/>
-              </a:spcBef>
+              <a:lnSpc>
+                <a:spcPct val="112000"/>
+              </a:lnSpc>
               <a:spcAft>
-                <a:spcPts val="1000"/>
+                <a:spcPts val="1200"/>
               </a:spcAft>
               <a:buChar char="•"/>
             </a:pPr>
             <a:r>
-              <a:rPr sz="1700" b="0" i="0">
-                <a:solidFill>
-                  <a:srgbClr val="1F2937"/>
-                </a:solidFill>
-              </a:rPr>
-              <a:t>Catatan jujur: PIHPS tidak mempublikasikan seri provinsi untuk beberapa kombinasi provinsi x komoditas (9 kombinasi) — dicatat sebagai gap, tidak diisi angka lain.</a:t>
+              <a:rPr sz="1600" b="0" i="0">
+                <a:solidFill>
+                  <a:srgbClr val="0B2A44"/>
+                </a:solidFill>
+                <a:latin typeface="Noto Sans"/>
+              </a:rPr>
+              <a:t>Catatan jujur: PIHPS tidak mempublikasikan seri provinsi untuk beberapa kombinasi provinsi x komoditas (9 kombinasi) - dicatat sebagai gap, tidak diisi angka lain.</a:t>
+            </a:r>
+          </a:p>
+        </p:txBody>
+      </p:sp>
+      <p:sp>
+        <p:nvSpPr>
+          <p:cNvPr id="5" name="Rectangle 4"/>
+          <p:cNvSpPr/>
+          <p:nvPr/>
+        </p:nvSpPr>
+        <p:spPr>
+          <a:xfrm>
+            <a:off x="7543800" y="1371600"/>
+            <a:ext cx="4005072" cy="4526280"/>
+          </a:xfrm>
+          <a:prstGeom prst="rect">
+            <a:avLst/>
+          </a:prstGeom>
+          <a:solidFill>
+            <a:srgbClr val="0E4D7A"/>
+          </a:solidFill>
+          <a:ln>
+            <a:noFill/>
+          </a:ln>
+          <a:effectLst/>
+        </p:spPr>
+        <p:style>
+          <a:lnRef idx="1">
+            <a:schemeClr val="accent1"/>
+          </a:lnRef>
+          <a:fillRef idx="3">
+            <a:schemeClr val="accent1"/>
+          </a:fillRef>
+          <a:effectRef idx="2">
+            <a:schemeClr val="accent1"/>
+          </a:effectRef>
+          <a:fontRef idx="minor">
+            <a:schemeClr val="lt1"/>
+          </a:fontRef>
+        </p:style>
+        <p:txBody>
+          <a:bodyPr rtlCol="0" anchor="ctr"/>
+          <a:lstStyle/>
+          <a:p>
+            <a:pPr algn="ctr"/>
+          </a:p>
+        </p:txBody>
+      </p:sp>
+      <p:sp>
+        <p:nvSpPr>
+          <p:cNvPr id="6" name="TextBox 5"/>
+          <p:cNvSpPr txBox="1"/>
+          <p:nvPr/>
+        </p:nvSpPr>
+        <p:spPr>
+          <a:xfrm>
+            <a:off x="7863840" y="1691640"/>
+            <a:ext cx="3429000" cy="4023360"/>
+          </a:xfrm>
+          <a:prstGeom prst="rect">
+            <a:avLst/>
+          </a:prstGeom>
+          <a:noFill/>
+        </p:spPr>
+        <p:txBody>
+          <a:bodyPr wrap="square" lIns="0" rIns="0" tIns="0" bIns="0">
+            <a:spAutoFit/>
+          </a:bodyPr>
+          <a:lstStyle/>
+          <a:p>
+            <a:pPr>
+              <a:spcAft>
+                <a:spcPts val="100"/>
+              </a:spcAft>
+            </a:pPr>
+            <a:r>
+              <a:rPr sz="2700" b="1" i="0">
+                <a:solidFill>
+                  <a:srgbClr val="F5C542"/>
+                </a:solidFill>
+                <a:latin typeface="Noto Sans"/>
+              </a:rPr>
+              <a:t>1,872</a:t>
+            </a:r>
+          </a:p>
+          <a:p>
+            <a:pPr>
+              <a:spcAft>
+                <a:spcPts val="1500"/>
+              </a:spcAft>
+            </a:pPr>
+            <a:r>
+              <a:rPr sz="1250" b="0" i="0">
+                <a:solidFill>
+                  <a:srgbClr val="FFFFFF"/>
+                </a:solidFill>
+                <a:latin typeface="Noto Sans"/>
+              </a:rPr>
+              <a:t>baris nasional</a:t>
+            </a:r>
+          </a:p>
+          <a:p>
+            <a:pPr>
+              <a:spcAft>
+                <a:spcPts val="100"/>
+              </a:spcAft>
+            </a:pPr>
+            <a:r>
+              <a:rPr sz="2700" b="1" i="0">
+                <a:solidFill>
+                  <a:srgbClr val="F5C542"/>
+                </a:solidFill>
+                <a:latin typeface="Noto Sans"/>
+              </a:rPr>
+              <a:t>59,436</a:t>
+            </a:r>
+          </a:p>
+          <a:p>
+            <a:pPr>
+              <a:spcAft>
+                <a:spcPts val="1500"/>
+              </a:spcAft>
+            </a:pPr>
+            <a:r>
+              <a:rPr sz="1250" b="0" i="0">
+                <a:solidFill>
+                  <a:srgbClr val="FFFFFF"/>
+                </a:solidFill>
+                <a:latin typeface="Noto Sans"/>
+              </a:rPr>
+              <a:t>baris provinsi</a:t>
+            </a:r>
+          </a:p>
+          <a:p>
+            <a:pPr>
+              <a:spcAft>
+                <a:spcPts val="100"/>
+              </a:spcAft>
+            </a:pPr>
+            <a:r>
+              <a:rPr sz="2700" b="1" i="0">
+                <a:solidFill>
+                  <a:srgbClr val="F5C542"/>
+                </a:solidFill>
+                <a:latin typeface="Noto Sans"/>
+              </a:rPr>
+              <a:t>58,253</a:t>
+            </a:r>
+          </a:p>
+          <a:p>
+            <a:pPr>
+              <a:spcAft>
+                <a:spcPts val="1500"/>
+              </a:spcAft>
+            </a:pPr>
+            <a:r>
+              <a:rPr sz="1250" b="0" i="0">
+                <a:solidFill>
+                  <a:srgbClr val="FFFFFF"/>
+                </a:solidFill>
+                <a:latin typeface="Noto Sans"/>
+              </a:rPr>
+              <a:t>baris provinsi dengan harga</a:t>
+            </a:r>
+          </a:p>
+          <a:p>
+            <a:pPr>
+              <a:spcAft>
+                <a:spcPts val="100"/>
+              </a:spcAft>
+            </a:pPr>
+            <a:r>
+              <a:rPr sz="2700" b="1" i="0">
+                <a:solidFill>
+                  <a:srgbClr val="F5C542"/>
+                </a:solidFill>
+                <a:latin typeface="Noto Sans"/>
+              </a:rPr>
+              <a:t>9</a:t>
+            </a:r>
+          </a:p>
+          <a:p>
+            <a:pPr>
+              <a:spcAft>
+                <a:spcPts val="1500"/>
+              </a:spcAft>
+            </a:pPr>
+            <a:r>
+              <a:rPr sz="1250" b="0" i="0">
+                <a:solidFill>
+                  <a:srgbClr val="FFFFFF"/>
+                </a:solidFill>
+                <a:latin typeface="Noto Sans"/>
+              </a:rPr>
+              <a:t>kombinasi provinsi x komoditas tanpa seri (gap)</a:t>
             </a:r>
           </a:p>
         </p:txBody>
@@ -3942,7 +4781,7 @@
     <p:bg>
       <p:bgPr>
         <a:solidFill>
-          <a:srgbClr val="FFFFFF"/>
+          <a:srgbClr val="F7F4EE"/>
         </a:solidFill>
         <a:effectLst/>
       </p:bgPr>
@@ -3962,8 +4801,8 @@
         </p:nvSpPr>
         <p:spPr>
           <a:xfrm>
-            <a:off x="640080" y="274320"/>
-            <a:ext cx="10881360" cy="822960"/>
+            <a:off x="640080" y="292608"/>
+            <a:ext cx="10908792" cy="777240"/>
           </a:xfrm>
           <a:prstGeom prst="rect">
             <a:avLst/>
@@ -3971,7 +4810,7 @@
           <a:noFill/>
         </p:spPr>
         <p:txBody>
-          <a:bodyPr wrap="square">
+          <a:bodyPr wrap="square" lIns="0" rIns="0" tIns="0" bIns="0">
             <a:spAutoFit/>
           </a:bodyPr>
           <a:lstStyle/>
@@ -3982,12 +4821,13 @@
               </a:spcAft>
             </a:pPr>
             <a:r>
-              <a:rPr sz="3000" b="1" i="0">
-                <a:solidFill>
-                  <a:srgbClr val="1E3A8A"/>
-                </a:solidFill>
-              </a:rPr>
-              <a:t>Tren Nasional 2025–2026</a:t>
+              <a:rPr sz="3100" b="1" i="0">
+                <a:solidFill>
+                  <a:srgbClr val="0B2A44"/>
+                </a:solidFill>
+                <a:latin typeface="Liberation Serif"/>
+              </a:rPr>
+              <a:t>Tren Nasional 2025-2026</a:t>
             </a:r>
           </a:p>
         </p:txBody>
@@ -4000,18 +4840,19 @@
         </p:nvSpPr>
         <p:spPr>
           <a:xfrm>
-            <a:off x="640080" y="1051560"/>
-            <a:ext cx="1371600" cy="54864"/>
+            <a:off x="658368" y="1060704"/>
+            <a:ext cx="2103120" cy="50292"/>
           </a:xfrm>
           <a:prstGeom prst="rect">
             <a:avLst/>
           </a:prstGeom>
           <a:solidFill>
-            <a:srgbClr val="0D9488"/>
+            <a:srgbClr val="E5322D"/>
           </a:solidFill>
           <a:ln>
             <a:noFill/>
           </a:ln>
+          <a:effectLst/>
         </p:spPr>
         <p:style>
           <a:lnRef idx="1">
@@ -4043,8 +4884,8 @@
         </p:nvSpPr>
         <p:spPr>
           <a:xfrm>
-            <a:off x="640080" y="1371600"/>
-            <a:ext cx="5120640" cy="4754880"/>
+            <a:off x="640080" y="1417320"/>
+            <a:ext cx="4846320" cy="4754880"/>
           </a:xfrm>
           <a:prstGeom prst="rect">
             <a:avLst/>
@@ -4052,63 +4893,66 @@
           <a:noFill/>
         </p:spPr>
         <p:txBody>
-          <a:bodyPr wrap="square">
+          <a:bodyPr wrap="square" lIns="0" rIns="0" tIns="0" bIns="0">
             <a:spAutoFit/>
           </a:bodyPr>
           <a:lstStyle/>
           <a:p>
             <a:pPr marL="171450" indent="-171450">
-              <a:spcBef>
-                <a:spcPts val="200"/>
-              </a:spcBef>
+              <a:lnSpc>
+                <a:spcPct val="112000"/>
+              </a:lnSpc>
               <a:spcAft>
-                <a:spcPts val="1000"/>
+                <a:spcPts val="1200"/>
               </a:spcAft>
               <a:buChar char="•"/>
             </a:pPr>
             <a:r>
-              <a:rPr sz="1700" b="0" i="0">
-                <a:solidFill>
-                  <a:srgbClr val="1F2937"/>
-                </a:solidFill>
+              <a:rPr sz="1600" b="0" i="0">
+                <a:solidFill>
+                  <a:srgbClr val="0B2A44"/>
+                </a:solidFill>
+                <a:latin typeface="Noto Sans"/>
               </a:rPr>
               <a:t>Rata-rata nasional 2026 tertinggi: Cabai Rawit Merah Rp74.530/kg, naik 13.3% dibanding 2025.</a:t>
             </a:r>
           </a:p>
           <a:p>
             <a:pPr marL="171450" indent="-171450">
-              <a:spcBef>
-                <a:spcPts val="200"/>
-              </a:spcBef>
+              <a:lnSpc>
+                <a:spcPct val="112000"/>
+              </a:lnSpc>
               <a:spcAft>
-                <a:spcPts val="1000"/>
+                <a:spcPts val="1200"/>
               </a:spcAft>
               <a:buChar char="•"/>
             </a:pPr>
             <a:r>
-              <a:rPr sz="1700" b="0" i="0">
-                <a:solidFill>
-                  <a:srgbClr val="1F2937"/>
-                </a:solidFill>
+              <a:rPr sz="1600" b="0" i="0">
+                <a:solidFill>
+                  <a:srgbClr val="0B2A44"/>
+                </a:solidFill>
+                <a:latin typeface="Noto Sans"/>
               </a:rPr>
               <a:t>Cabai Merah Besar rata-rata Rp51.706/kg (-2.9% vs 2025); Keriting Rp53.277/kg (-4.2%); Rawit Hijau Rp56.578/kg (+10.7%).</a:t>
             </a:r>
           </a:p>
           <a:p>
             <a:pPr marL="171450" indent="-171450">
-              <a:spcBef>
-                <a:spcPts val="200"/>
-              </a:spcBef>
+              <a:lnSpc>
+                <a:spcPct val="112000"/>
+              </a:lnSpc>
               <a:spcAft>
-                <a:spcPts val="1000"/>
+                <a:spcPts val="1200"/>
               </a:spcAft>
               <a:buChar char="•"/>
             </a:pPr>
             <a:r>
-              <a:rPr sz="1700" b="0" i="0">
-                <a:solidFill>
-                  <a:srgbClr val="1F2937"/>
-                </a:solidFill>
+              <a:rPr sz="1600" b="0" i="0">
+                <a:solidFill>
+                  <a:srgbClr val="0B2A44"/>
+                </a:solidFill>
+                <a:latin typeface="Noto Sans"/>
               </a:rPr>
               <a:t>Keempat komoditas bergerak searah pada lonjakan besar, tapi dengan amplitudo berbeda.</a:t>
             </a:r>
@@ -4131,14 +4975,100 @@
         </p:blipFill>
         <p:spPr>
           <a:xfrm>
-            <a:off x="6217920" y="1371600"/>
-            <a:ext cx="5303520" cy="2430780"/>
+            <a:off x="5715000" y="1463040"/>
+            <a:ext cx="5989320" cy="2745105"/>
           </a:xfrm>
           <a:prstGeom prst="rect">
             <a:avLst/>
           </a:prstGeom>
         </p:spPr>
       </p:pic>
+      <p:sp>
+        <p:nvSpPr>
+          <p:cNvPr id="6" name="Rectangle 5"/>
+          <p:cNvSpPr/>
+          <p:nvPr/>
+        </p:nvSpPr>
+        <p:spPr>
+          <a:xfrm>
+            <a:off x="5715000" y="4480560"/>
+            <a:ext cx="5989320" cy="960120"/>
+          </a:xfrm>
+          <a:prstGeom prst="rect">
+            <a:avLst/>
+          </a:prstGeom>
+          <a:solidFill>
+            <a:srgbClr val="F5C542"/>
+          </a:solidFill>
+          <a:ln>
+            <a:noFill/>
+          </a:ln>
+          <a:effectLst/>
+        </p:spPr>
+        <p:style>
+          <a:lnRef idx="1">
+            <a:schemeClr val="accent1"/>
+          </a:lnRef>
+          <a:fillRef idx="3">
+            <a:schemeClr val="accent1"/>
+          </a:fillRef>
+          <a:effectRef idx="2">
+            <a:schemeClr val="accent1"/>
+          </a:effectRef>
+          <a:fontRef idx="minor">
+            <a:schemeClr val="lt1"/>
+          </a:fontRef>
+        </p:style>
+        <p:txBody>
+          <a:bodyPr rtlCol="0" anchor="ctr"/>
+          <a:lstStyle/>
+          <a:p>
+            <a:pPr algn="ctr"/>
+          </a:p>
+        </p:txBody>
+      </p:sp>
+      <p:sp>
+        <p:nvSpPr>
+          <p:cNvPr id="7" name="TextBox 6"/>
+          <p:cNvSpPr txBox="1"/>
+          <p:nvPr/>
+        </p:nvSpPr>
+        <p:spPr>
+          <a:xfrm>
+            <a:off x="5989320" y="4681728"/>
+            <a:ext cx="5486400" cy="594360"/>
+          </a:xfrm>
+          <a:prstGeom prst="rect">
+            <a:avLst/>
+          </a:prstGeom>
+          <a:noFill/>
+        </p:spPr>
+        <p:txBody>
+          <a:bodyPr wrap="square" lIns="0" rIns="0" tIns="0" bIns="0">
+            <a:spAutoFit/>
+          </a:bodyPr>
+          <a:lstStyle/>
+          <a:p>
+            <a:pPr>
+              <a:lnSpc>
+                <a:spcPct val="112000"/>
+              </a:lnSpc>
+              <a:spcAft>
+                <a:spcPts val="800"/>
+              </a:spcAft>
+            </a:pPr>
+            <a:r>
+              <a:rPr sz="1450" b="1" i="0">
+                <a:solidFill>
+                  <a:srgbClr val="0B2A44"/>
+                </a:solidFill>
+                <a:latin typeface="Noto Sans"/>
+              </a:rPr>
+              <a:t>Cabai Rawit Merah rata-rata Rp74.530/kg di 2026, naik 13.3% dibanding 2025.</a:t>
+            </a:r>
+          </a:p>
+        </p:txBody>
+      </p:sp>
     </p:spTree>
   </p:cSld>
   <p:clrMapOvr>
@@ -4153,7 +5083,7 @@
     <p:bg>
       <p:bgPr>
         <a:solidFill>
-          <a:srgbClr val="FFFFFF"/>
+          <a:srgbClr val="F7F4EE"/>
         </a:solidFill>
         <a:effectLst/>
       </p:bgPr>
@@ -4173,8 +5103,8 @@
         </p:nvSpPr>
         <p:spPr>
           <a:xfrm>
-            <a:off x="640080" y="274320"/>
-            <a:ext cx="10881360" cy="822960"/>
+            <a:off x="640080" y="292608"/>
+            <a:ext cx="10908792" cy="777240"/>
           </a:xfrm>
           <a:prstGeom prst="rect">
             <a:avLst/>
@@ -4182,7 +5112,7 @@
           <a:noFill/>
         </p:spPr>
         <p:txBody>
-          <a:bodyPr wrap="square">
+          <a:bodyPr wrap="square" lIns="0" rIns="0" tIns="0" bIns="0">
             <a:spAutoFit/>
           </a:bodyPr>
           <a:lstStyle/>
@@ -4193,10 +5123,11 @@
               </a:spcAft>
             </a:pPr>
             <a:r>
-              <a:rPr sz="3000" b="1" i="0">
-                <a:solidFill>
-                  <a:srgbClr val="1E3A8A"/>
-                </a:solidFill>
+              <a:rPr sz="3100" b="1" i="0">
+                <a:solidFill>
+                  <a:srgbClr val="0B2A44"/>
+                </a:solidFill>
+                <a:latin typeface="Liberation Serif"/>
               </a:rPr>
               <a:t>Lonjakan Oktober 2026</a:t>
             </a:r>
@@ -4211,18 +5142,19 @@
         </p:nvSpPr>
         <p:spPr>
           <a:xfrm>
-            <a:off x="640080" y="1051560"/>
-            <a:ext cx="1371600" cy="54864"/>
+            <a:off x="658368" y="1060704"/>
+            <a:ext cx="2103120" cy="50292"/>
           </a:xfrm>
           <a:prstGeom prst="rect">
             <a:avLst/>
           </a:prstGeom>
           <a:solidFill>
-            <a:srgbClr val="0D9488"/>
+            <a:srgbClr val="E5322D"/>
           </a:solidFill>
           <a:ln>
             <a:noFill/>
           </a:ln>
+          <a:effectLst/>
         </p:spPr>
         <p:style>
           <a:lnRef idx="1">
@@ -4255,7 +5187,7 @@
         <p:spPr>
           <a:xfrm>
             <a:off x="640080" y="1371600"/>
-            <a:ext cx="5120640" cy="4754880"/>
+            <a:ext cx="5029200" cy="4937760"/>
           </a:xfrm>
           <a:prstGeom prst="rect">
             <a:avLst/>
@@ -4263,101 +5195,106 @@
           <a:noFill/>
         </p:spPr>
         <p:txBody>
-          <a:bodyPr wrap="square">
+          <a:bodyPr wrap="square" lIns="0" rIns="0" tIns="0" bIns="0">
             <a:spAutoFit/>
           </a:bodyPr>
           <a:lstStyle/>
           <a:p>
             <a:pPr marL="171450" indent="-171450">
-              <a:spcBef>
-                <a:spcPts val="200"/>
-              </a:spcBef>
+              <a:lnSpc>
+                <a:spcPct val="112000"/>
+              </a:lnSpc>
               <a:spcAft>
-                <a:spcPts val="1000"/>
+                <a:spcPts val="1200"/>
               </a:spcAft>
               <a:buChar char="•"/>
             </a:pPr>
             <a:r>
-              <a:rPr sz="1700" b="0" i="0">
-                <a:solidFill>
-                  <a:srgbClr val="1F2937"/>
-                </a:solidFill>
+              <a:rPr sz="1550" b="0" i="0">
+                <a:solidFill>
+                  <a:srgbClr val="0B2A44"/>
+                </a:solidFill>
+                <a:latin typeface="Noto Sans"/>
               </a:rPr>
               <a:t>Cabai Rawit Merah menembus Rp100.000/kg pada 2026-09-30 (Rp100.550/kg).</a:t>
             </a:r>
           </a:p>
           <a:p>
             <a:pPr marL="171450" indent="-171450">
-              <a:spcBef>
-                <a:spcPts val="200"/>
-              </a:spcBef>
+              <a:lnSpc>
+                <a:spcPct val="112000"/>
+              </a:lnSpc>
               <a:spcAft>
-                <a:spcPts val="1000"/>
+                <a:spcPts val="1200"/>
               </a:spcAft>
               <a:buChar char="•"/>
             </a:pPr>
             <a:r>
-              <a:rPr sz="1700" b="0" i="0">
-                <a:solidFill>
-                  <a:srgbClr val="1F2937"/>
-                </a:solidFill>
+              <a:rPr sz="1550" b="0" i="0">
+                <a:solidFill>
+                  <a:srgbClr val="0B2A44"/>
+                </a:solidFill>
+                <a:latin typeface="Noto Sans"/>
               </a:rPr>
               <a:t>Dan menembus Rp105.000/kg pada 2026-10-12 (Rp105.300/kg).</a:t>
             </a:r>
           </a:p>
           <a:p>
             <a:pPr marL="171450" indent="-171450">
-              <a:spcBef>
-                <a:spcPts val="200"/>
-              </a:spcBef>
+              <a:lnSpc>
+                <a:spcPct val="112000"/>
+              </a:lnSpc>
               <a:spcAft>
-                <a:spcPts val="1000"/>
+                <a:spcPts val="1200"/>
               </a:spcAft>
               <a:buChar char="•"/>
             </a:pPr>
             <a:r>
-              <a:rPr sz="1700" b="0" i="0">
-                <a:solidFill>
-                  <a:srgbClr val="1F2937"/>
-                </a:solidFill>
+              <a:rPr sz="1550" b="0" i="0">
+                <a:solidFill>
+                  <a:srgbClr val="0B2A44"/>
+                </a:solidFill>
+                <a:latin typeface="Noto Sans"/>
               </a:rPr>
               <a:t>Dari akhir September (Rp100.550/kg) ke puncak Oktober (Rp105.300/kg pada 2026-10-12), naik 4.7%.</a:t>
             </a:r>
           </a:p>
           <a:p>
             <a:pPr marL="171450" indent="-171450">
-              <a:spcBef>
-                <a:spcPts val="200"/>
-              </a:spcBef>
+              <a:lnSpc>
+                <a:spcPct val="112000"/>
+              </a:lnSpc>
               <a:spcAft>
-                <a:spcPts val="1000"/>
+                <a:spcPts val="1200"/>
               </a:spcAft>
               <a:buChar char="•"/>
             </a:pPr>
             <a:r>
-              <a:rPr sz="1700" b="0" i="0">
-                <a:solidFill>
-                  <a:srgbClr val="1F2937"/>
-                </a:solidFill>
+              <a:rPr sz="1550" b="0" i="0">
+                <a:solidFill>
+                  <a:srgbClr val="0B2A44"/>
+                </a:solidFill>
+                <a:latin typeface="Noto Sans"/>
               </a:rPr>
               <a:t>Kenaikan terbesar terjadi pada September: rata-rata bulanan naik +39.3% dibanding Agustus, lalu Oktober naik lagi +11.3%.</a:t>
             </a:r>
           </a:p>
           <a:p>
             <a:pPr marL="171450" indent="-171450">
-              <a:spcBef>
-                <a:spcPts val="200"/>
-              </a:spcBef>
+              <a:lnSpc>
+                <a:spcPct val="112000"/>
+              </a:lnSpc>
               <a:spcAft>
-                <a:spcPts val="1000"/>
+                <a:spcPts val="1200"/>
               </a:spcAft>
               <a:buChar char="•"/>
             </a:pPr>
             <a:r>
-              <a:rPr sz="1700" b="0" i="0">
-                <a:solidFill>
-                  <a:srgbClr val="1F2937"/>
-                </a:solidFill>
+              <a:rPr sz="1550" b="0" i="0">
+                <a:solidFill>
+                  <a:srgbClr val="0B2A44"/>
+                </a:solidFill>
+                <a:latin typeface="Noto Sans"/>
               </a:rPr>
               <a:t>Lonjakan ini yang membuat cabai menjadi berita utama pertengahan Oktober 2026.</a:t>
             </a:r>
@@ -4380,14 +5317,143 @@
         </p:blipFill>
         <p:spPr>
           <a:xfrm>
-            <a:off x="6217920" y="1371600"/>
-            <a:ext cx="5303520" cy="2430780"/>
+            <a:off x="5943600" y="1417320"/>
+            <a:ext cx="5760720" cy="2640330"/>
           </a:xfrm>
           <a:prstGeom prst="rect">
             <a:avLst/>
           </a:prstGeom>
         </p:spPr>
       </p:pic>
+      <p:sp>
+        <p:nvSpPr>
+          <p:cNvPr id="6" name="Rectangle 5"/>
+          <p:cNvSpPr/>
+          <p:nvPr/>
+        </p:nvSpPr>
+        <p:spPr>
+          <a:xfrm>
+            <a:off x="5943600" y="4279392"/>
+            <a:ext cx="5760720" cy="1755648"/>
+          </a:xfrm>
+          <a:prstGeom prst="rect">
+            <a:avLst/>
+          </a:prstGeom>
+          <a:solidFill>
+            <a:srgbClr val="0E4D7A"/>
+          </a:solidFill>
+          <a:ln>
+            <a:noFill/>
+          </a:ln>
+          <a:effectLst/>
+        </p:spPr>
+        <p:style>
+          <a:lnRef idx="1">
+            <a:schemeClr val="accent1"/>
+          </a:lnRef>
+          <a:fillRef idx="3">
+            <a:schemeClr val="accent1"/>
+          </a:fillRef>
+          <a:effectRef idx="2">
+            <a:schemeClr val="accent1"/>
+          </a:effectRef>
+          <a:fontRef idx="minor">
+            <a:schemeClr val="lt1"/>
+          </a:fontRef>
+        </p:style>
+        <p:txBody>
+          <a:bodyPr rtlCol="0" anchor="ctr"/>
+          <a:lstStyle/>
+          <a:p>
+            <a:pPr algn="ctr"/>
+          </a:p>
+        </p:txBody>
+      </p:sp>
+      <p:sp>
+        <p:nvSpPr>
+          <p:cNvPr id="7" name="TextBox 6"/>
+          <p:cNvSpPr txBox="1"/>
+          <p:nvPr/>
+        </p:nvSpPr>
+        <p:spPr>
+          <a:xfrm>
+            <a:off x="6236208" y="4480560"/>
+            <a:ext cx="5212080" cy="868680"/>
+          </a:xfrm>
+          <a:prstGeom prst="rect">
+            <a:avLst/>
+          </a:prstGeom>
+          <a:noFill/>
+        </p:spPr>
+        <p:txBody>
+          <a:bodyPr wrap="square" lIns="0" rIns="0" tIns="0" bIns="0">
+            <a:spAutoFit/>
+          </a:bodyPr>
+          <a:lstStyle/>
+          <a:p>
+            <a:r>
+              <a:rPr sz="3800" b="1">
+                <a:solidFill>
+                  <a:srgbClr val="F5C542"/>
+                </a:solidFill>
+                <a:latin typeface="Noto Sans"/>
+              </a:rPr>
+              <a:t>Rp105.300</a:t>
+            </a:r>
+            <a:r>
+              <a:rPr sz="1600" b="1">
+                <a:solidFill>
+                  <a:srgbClr val="F5C542"/>
+                </a:solidFill>
+                <a:latin typeface="Noto Sans"/>
+              </a:rPr>
+              <a:t>/kg</a:t>
+            </a:r>
+          </a:p>
+        </p:txBody>
+      </p:sp>
+      <p:sp>
+        <p:nvSpPr>
+          <p:cNvPr id="8" name="TextBox 7"/>
+          <p:cNvSpPr txBox="1"/>
+          <p:nvPr/>
+        </p:nvSpPr>
+        <p:spPr>
+          <a:xfrm>
+            <a:off x="6236208" y="5349240"/>
+            <a:ext cx="5212080" cy="548640"/>
+          </a:xfrm>
+          <a:prstGeom prst="rect">
+            <a:avLst/>
+          </a:prstGeom>
+          <a:noFill/>
+        </p:spPr>
+        <p:txBody>
+          <a:bodyPr wrap="square" lIns="0" rIns="0" tIns="0" bIns="0">
+            <a:spAutoFit/>
+          </a:bodyPr>
+          <a:lstStyle/>
+          <a:p>
+            <a:pPr>
+              <a:lnSpc>
+                <a:spcPct val="115000"/>
+              </a:lnSpc>
+              <a:spcAft>
+                <a:spcPts val="800"/>
+              </a:spcAft>
+            </a:pPr>
+            <a:r>
+              <a:rPr sz="1250" b="0" i="0">
+                <a:solidFill>
+                  <a:srgbClr val="FFFFFF"/>
+                </a:solidFill>
+                <a:latin typeface="Noto Sans"/>
+              </a:rPr>
+              <a:t>Puncak 2026-10-12 - naik 4.7% dari akhir September (Rp100.550/kg).</a:t>
+            </a:r>
+          </a:p>
+        </p:txBody>
+      </p:sp>
     </p:spTree>
   </p:cSld>
   <p:clrMapOvr>
@@ -4402,7 +5468,7 @@
     <p:bg>
       <p:bgPr>
         <a:solidFill>
-          <a:srgbClr val="FFFFFF"/>
+          <a:srgbClr val="F7F4EE"/>
         </a:solidFill>
         <a:effectLst/>
       </p:bgPr>
@@ -4422,8 +5488,8 @@
         </p:nvSpPr>
         <p:spPr>
           <a:xfrm>
-            <a:off x="640080" y="274320"/>
-            <a:ext cx="10881360" cy="822960"/>
+            <a:off x="640080" y="292608"/>
+            <a:ext cx="10908792" cy="777240"/>
           </a:xfrm>
           <a:prstGeom prst="rect">
             <a:avLst/>
@@ -4431,7 +5497,7 @@
           <a:noFill/>
         </p:spPr>
         <p:txBody>
-          <a:bodyPr wrap="square">
+          <a:bodyPr wrap="square" lIns="0" rIns="0" tIns="0" bIns="0">
             <a:spAutoFit/>
           </a:bodyPr>
           <a:lstStyle/>
@@ -4442,10 +5508,11 @@
               </a:spcAft>
             </a:pPr>
             <a:r>
-              <a:rPr sz="3000" b="1" i="0">
-                <a:solidFill>
-                  <a:srgbClr val="1E3A8A"/>
-                </a:solidFill>
+              <a:rPr sz="3100" b="1" i="0">
+                <a:solidFill>
+                  <a:srgbClr val="0B2A44"/>
+                </a:solidFill>
+                <a:latin typeface="Liberation Serif"/>
               </a:rPr>
               <a:t>Volatilitas: Cabai Mana yang Paling Liar?</a:t>
             </a:r>
@@ -4460,18 +5527,19 @@
         </p:nvSpPr>
         <p:spPr>
           <a:xfrm>
-            <a:off x="640080" y="1051560"/>
-            <a:ext cx="1371600" cy="54864"/>
+            <a:off x="658368" y="1060704"/>
+            <a:ext cx="2103120" cy="50292"/>
           </a:xfrm>
           <a:prstGeom prst="rect">
             <a:avLst/>
           </a:prstGeom>
           <a:solidFill>
-            <a:srgbClr val="0D9488"/>
+            <a:srgbClr val="E5322D"/>
           </a:solidFill>
           <a:ln>
             <a:noFill/>
           </a:ln>
+          <a:effectLst/>
         </p:spPr>
         <p:style>
           <a:lnRef idx="1">
@@ -4495,108 +5563,9 @@
           </a:p>
         </p:txBody>
       </p:sp>
-      <p:sp>
-        <p:nvSpPr>
-          <p:cNvPr id="4" name="TextBox 3"/>
-          <p:cNvSpPr txBox="1"/>
-          <p:nvPr/>
-        </p:nvSpPr>
-        <p:spPr>
-          <a:xfrm>
-            <a:off x="640080" y="1371600"/>
-            <a:ext cx="5120640" cy="4754880"/>
-          </a:xfrm>
-          <a:prstGeom prst="rect">
-            <a:avLst/>
-          </a:prstGeom>
-          <a:noFill/>
-        </p:spPr>
-        <p:txBody>
-          <a:bodyPr wrap="square">
-            <a:spAutoFit/>
-          </a:bodyPr>
-          <a:lstStyle/>
-          <a:p>
-            <a:pPr marL="171450" indent="-171450">
-              <a:spcBef>
-                <a:spcPts val="200"/>
-              </a:spcBef>
-              <a:spcAft>
-                <a:spcPts val="1000"/>
-              </a:spcAft>
-              <a:buChar char="•"/>
-            </a:pPr>
-            <a:r>
-              <a:rPr sz="1700" b="0" i="0">
-                <a:solidFill>
-                  <a:srgbClr val="1F2937"/>
-                </a:solidFill>
-              </a:rPr>
-              <a:t>Cabai Merah Keriting paling volatile di 2026: koefisien variasi 20.0%, rentang Rp39.650/kg sampai Rp88.350/kg.</a:t>
-            </a:r>
-          </a:p>
-          <a:p>
-            <a:pPr marL="171450" indent="-171450">
-              <a:spcBef>
-                <a:spcPts val="200"/>
-              </a:spcBef>
-              <a:spcAft>
-                <a:spcPts val="1000"/>
-              </a:spcAft>
-              <a:buChar char="•"/>
-            </a:pPr>
-            <a:r>
-              <a:rPr sz="1700" b="0" i="0">
-                <a:solidFill>
-                  <a:srgbClr val="1F2937"/>
-                </a:solidFill>
-              </a:rPr>
-              <a:t>Yang paling stabil: Cabai Rawit Hijau (CV 12.3%).</a:t>
-            </a:r>
-          </a:p>
-          <a:p>
-            <a:pPr marL="171450" indent="-171450">
-              <a:spcBef>
-                <a:spcPts val="200"/>
-              </a:spcBef>
-              <a:spcAft>
-                <a:spcPts val="1000"/>
-              </a:spcAft>
-              <a:buChar char="•"/>
-            </a:pPr>
-            <a:r>
-              <a:rPr sz="1700" b="0" i="0">
-                <a:solidFill>
-                  <a:srgbClr val="1F2937"/>
-                </a:solidFill>
-              </a:rPr>
-              <a:t>Volatilitas tinggi berarti harga sulit diprediksi: pedagang dan konsumen sama-sama menanggung ketidakpastian.</a:t>
-            </a:r>
-          </a:p>
-          <a:p>
-            <a:pPr marL="171450" indent="-171450">
-              <a:spcBef>
-                <a:spcPts val="200"/>
-              </a:spcBef>
-              <a:spcAft>
-                <a:spcPts val="1000"/>
-              </a:spcAft>
-              <a:buChar char="•"/>
-            </a:pPr>
-            <a:r>
-              <a:rPr sz="1700" b="0" i="0">
-                <a:solidFill>
-                  <a:srgbClr val="1F2937"/>
-                </a:solidFill>
-              </a:rPr>
-              <a:t>Lonjakan harian terbesar 2026: Cabai Merah Keriting +20.4% pada 2026-05-25, Cabai Merah Besar +17.2% pada 2026-05-25.</a:t>
-            </a:r>
-          </a:p>
-        </p:txBody>
-      </p:sp>
       <p:pic>
         <p:nvPicPr>
-          <p:cNvPr id="5" name="Picture 4" descr="03_volatilitas.png"/>
+          <p:cNvPr id="4" name="Picture 3" descr="03_volatilitas.png"/>
           <p:cNvPicPr>
             <a:picLocks noChangeAspect="1"/>
           </p:cNvPicPr>
@@ -4610,14 +5579,203 @@
         </p:blipFill>
         <p:spPr>
           <a:xfrm>
-            <a:off x="6217920" y="1371600"/>
-            <a:ext cx="5303520" cy="2651760"/>
+            <a:off x="640080" y="1463040"/>
+            <a:ext cx="5212080" cy="2606040"/>
           </a:xfrm>
           <a:prstGeom prst="rect">
             <a:avLst/>
           </a:prstGeom>
         </p:spPr>
       </p:pic>
+      <p:sp>
+        <p:nvSpPr>
+          <p:cNvPr id="5" name="Rectangle 4"/>
+          <p:cNvSpPr/>
+          <p:nvPr/>
+        </p:nvSpPr>
+        <p:spPr>
+          <a:xfrm>
+            <a:off x="640080" y="4315968"/>
+            <a:ext cx="5212080" cy="914400"/>
+          </a:xfrm>
+          <a:prstGeom prst="rect">
+            <a:avLst/>
+          </a:prstGeom>
+          <a:solidFill>
+            <a:srgbClr val="E5322D"/>
+          </a:solidFill>
+          <a:ln>
+            <a:noFill/>
+          </a:ln>
+          <a:effectLst/>
+        </p:spPr>
+        <p:style>
+          <a:lnRef idx="1">
+            <a:schemeClr val="accent1"/>
+          </a:lnRef>
+          <a:fillRef idx="3">
+            <a:schemeClr val="accent1"/>
+          </a:fillRef>
+          <a:effectRef idx="2">
+            <a:schemeClr val="accent1"/>
+          </a:effectRef>
+          <a:fontRef idx="minor">
+            <a:schemeClr val="lt1"/>
+          </a:fontRef>
+        </p:style>
+        <p:txBody>
+          <a:bodyPr rtlCol="0" anchor="ctr"/>
+          <a:lstStyle/>
+          <a:p>
+            <a:pPr algn="ctr"/>
+          </a:p>
+        </p:txBody>
+      </p:sp>
+      <p:sp>
+        <p:nvSpPr>
+          <p:cNvPr id="6" name="TextBox 5"/>
+          <p:cNvSpPr txBox="1"/>
+          <p:nvPr/>
+        </p:nvSpPr>
+        <p:spPr>
+          <a:xfrm>
+            <a:off x="914400" y="4526280"/>
+            <a:ext cx="4709160" cy="548640"/>
+          </a:xfrm>
+          <a:prstGeom prst="rect">
+            <a:avLst/>
+          </a:prstGeom>
+          <a:noFill/>
+        </p:spPr>
+        <p:txBody>
+          <a:bodyPr wrap="square" lIns="0" rIns="0" tIns="0" bIns="0">
+            <a:spAutoFit/>
+          </a:bodyPr>
+          <a:lstStyle/>
+          <a:p>
+            <a:pPr>
+              <a:lnSpc>
+                <a:spcPct val="112000"/>
+              </a:lnSpc>
+              <a:spcAft>
+                <a:spcPts val="800"/>
+              </a:spcAft>
+            </a:pPr>
+            <a:r>
+              <a:rPr sz="1500" b="1" i="0">
+                <a:solidFill>
+                  <a:srgbClr val="FFFFFF"/>
+                </a:solidFill>
+                <a:latin typeface="Noto Sans"/>
+              </a:rPr>
+              <a:t>Paling volatile: Cabai Merah Keriting - CV 20.0%</a:t>
+            </a:r>
+          </a:p>
+        </p:txBody>
+      </p:sp>
+      <p:sp>
+        <p:nvSpPr>
+          <p:cNvPr id="7" name="TextBox 6"/>
+          <p:cNvSpPr txBox="1"/>
+          <p:nvPr/>
+        </p:nvSpPr>
+        <p:spPr>
+          <a:xfrm>
+            <a:off x="6172200" y="1417320"/>
+            <a:ext cx="5394960" cy="4754880"/>
+          </a:xfrm>
+          <a:prstGeom prst="rect">
+            <a:avLst/>
+          </a:prstGeom>
+          <a:noFill/>
+        </p:spPr>
+        <p:txBody>
+          <a:bodyPr wrap="square" lIns="0" rIns="0" tIns="0" bIns="0">
+            <a:spAutoFit/>
+          </a:bodyPr>
+          <a:lstStyle/>
+          <a:p>
+            <a:pPr marL="171450" indent="-171450">
+              <a:lnSpc>
+                <a:spcPct val="112000"/>
+              </a:lnSpc>
+              <a:spcAft>
+                <a:spcPts val="1200"/>
+              </a:spcAft>
+              <a:buChar char="•"/>
+            </a:pPr>
+            <a:r>
+              <a:rPr sz="1600" b="0" i="0">
+                <a:solidFill>
+                  <a:srgbClr val="0B2A44"/>
+                </a:solidFill>
+                <a:latin typeface="Noto Sans"/>
+              </a:rPr>
+              <a:t>Cabai Merah Keriting paling volatile di 2026: koefisien variasi 20.0%, rentang Rp39.650/kg sampai Rp88.350/kg.</a:t>
+            </a:r>
+          </a:p>
+          <a:p>
+            <a:pPr marL="171450" indent="-171450">
+              <a:lnSpc>
+                <a:spcPct val="112000"/>
+              </a:lnSpc>
+              <a:spcAft>
+                <a:spcPts val="1200"/>
+              </a:spcAft>
+              <a:buChar char="•"/>
+            </a:pPr>
+            <a:r>
+              <a:rPr sz="1600" b="0" i="0">
+                <a:solidFill>
+                  <a:srgbClr val="0B2A44"/>
+                </a:solidFill>
+                <a:latin typeface="Noto Sans"/>
+              </a:rPr>
+              <a:t>Yang paling stabil: Cabai Rawit Hijau (CV 12.3%).</a:t>
+            </a:r>
+          </a:p>
+          <a:p>
+            <a:pPr marL="171450" indent="-171450">
+              <a:lnSpc>
+                <a:spcPct val="112000"/>
+              </a:lnSpc>
+              <a:spcAft>
+                <a:spcPts val="1200"/>
+              </a:spcAft>
+              <a:buChar char="•"/>
+            </a:pPr>
+            <a:r>
+              <a:rPr sz="1600" b="0" i="0">
+                <a:solidFill>
+                  <a:srgbClr val="0B2A44"/>
+                </a:solidFill>
+                <a:latin typeface="Noto Sans"/>
+              </a:rPr>
+              <a:t>Volatilitas tinggi berarti harga sulit diprediksi: pedagang dan konsumen sama-sama menanggung ketidakpastian.</a:t>
+            </a:r>
+          </a:p>
+          <a:p>
+            <a:pPr marL="171450" indent="-171450">
+              <a:lnSpc>
+                <a:spcPct val="112000"/>
+              </a:lnSpc>
+              <a:spcAft>
+                <a:spcPts val="1200"/>
+              </a:spcAft>
+              <a:buChar char="•"/>
+            </a:pPr>
+            <a:r>
+              <a:rPr sz="1600" b="0" i="0">
+                <a:solidFill>
+                  <a:srgbClr val="0B2A44"/>
+                </a:solidFill>
+                <a:latin typeface="Noto Sans"/>
+              </a:rPr>
+              <a:t>Lonjakan harian terbesar 2026: Cabai Merah Keriting +20.4% pada 2026-05-25, Cabai Merah Besar +17.2% pada 2026-05-25.</a:t>
+            </a:r>
+          </a:p>
+        </p:txBody>
+      </p:sp>
     </p:spTree>
   </p:cSld>
   <p:clrMapOvr>
@@ -4632,7 +5790,7 @@
     <p:bg>
       <p:bgPr>
         <a:solidFill>
-          <a:srgbClr val="FFFFFF"/>
+          <a:srgbClr val="F7F4EE"/>
         </a:solidFill>
         <a:effectLst/>
       </p:bgPr>
@@ -4652,8 +5810,8 @@
         </p:nvSpPr>
         <p:spPr>
           <a:xfrm>
-            <a:off x="640080" y="274320"/>
-            <a:ext cx="10881360" cy="822960"/>
+            <a:off x="640080" y="292608"/>
+            <a:ext cx="10908792" cy="777240"/>
           </a:xfrm>
           <a:prstGeom prst="rect">
             <a:avLst/>
@@ -4661,7 +5819,7 @@
           <a:noFill/>
         </p:spPr>
         <p:txBody>
-          <a:bodyPr wrap="square">
+          <a:bodyPr wrap="square" lIns="0" rIns="0" tIns="0" bIns="0">
             <a:spAutoFit/>
           </a:bodyPr>
           <a:lstStyle/>
@@ -4672,10 +5830,11 @@
               </a:spcAft>
             </a:pPr>
             <a:r>
-              <a:rPr sz="3000" b="1" i="0">
-                <a:solidFill>
-                  <a:srgbClr val="1E3A8A"/>
-                </a:solidFill>
+              <a:rPr sz="3100" b="1" i="0">
+                <a:solidFill>
+                  <a:srgbClr val="0B2A44"/>
+                </a:solidFill>
+                <a:latin typeface="Liberation Serif"/>
               </a:rPr>
               <a:t>Disparitas Antar Provinsi</a:t>
             </a:r>
@@ -4690,18 +5849,19 @@
         </p:nvSpPr>
         <p:spPr>
           <a:xfrm>
-            <a:off x="640080" y="1051560"/>
-            <a:ext cx="1371600" cy="54864"/>
+            <a:off x="658368" y="1060704"/>
+            <a:ext cx="2103120" cy="50292"/>
           </a:xfrm>
           <a:prstGeom prst="rect">
             <a:avLst/>
           </a:prstGeom>
           <a:solidFill>
-            <a:srgbClr val="0D9488"/>
+            <a:srgbClr val="E5322D"/>
           </a:solidFill>
           <a:ln>
             <a:noFill/>
           </a:ln>
+          <a:effectLst/>
         </p:spPr>
         <p:style>
           <a:lnRef idx="1">
@@ -4733,8 +5893,8 @@
         </p:nvSpPr>
         <p:spPr>
           <a:xfrm>
-            <a:off x="640080" y="1371600"/>
-            <a:ext cx="5120640" cy="4754880"/>
+            <a:off x="640080" y="1417320"/>
+            <a:ext cx="4937760" cy="3200400"/>
           </a:xfrm>
           <a:prstGeom prst="rect">
             <a:avLst/>
@@ -4742,72 +5902,161 @@
           <a:noFill/>
         </p:spPr>
         <p:txBody>
-          <a:bodyPr wrap="square">
+          <a:bodyPr wrap="square" lIns="0" rIns="0" tIns="0" bIns="0">
             <a:spAutoFit/>
           </a:bodyPr>
           <a:lstStyle/>
           <a:p>
             <a:pPr marL="171450" indent="-171450">
-              <a:spcBef>
-                <a:spcPts val="200"/>
-              </a:spcBef>
+              <a:lnSpc>
+                <a:spcPct val="112000"/>
+              </a:lnSpc>
               <a:spcAft>
-                <a:spcPts val="1000"/>
+                <a:spcPts val="1200"/>
               </a:spcAft>
               <a:buChar char="•"/>
             </a:pPr>
             <a:r>
-              <a:rPr sz="1700" b="0" i="0">
-                <a:solidFill>
-                  <a:srgbClr val="1F2937"/>
-                </a:solidFill>
-              </a:rPr>
-              <a:t>2026, Cabai Rawit Merah termahal di Maluku Utara (rata-rata Rp113.213/kg), termurah di Sumatera Utara (Rp46.494/kg) — selisih Rp66.719/kg (143.5%).</a:t>
+              <a:rPr sz="1600" b="0" i="0">
+                <a:solidFill>
+                  <a:srgbClr val="0B2A44"/>
+                </a:solidFill>
+                <a:latin typeface="Noto Sans"/>
+              </a:rPr>
+              <a:t>2026, Cabai Rawit Merah termahal di Maluku Utara (rata-rata Rp113.213/kg), termurah di Sumatera Utara (Rp46.494/kg) - selisih Rp66.719/kg (143.5%).</a:t>
             </a:r>
           </a:p>
           <a:p>
             <a:pPr marL="171450" indent="-171450">
-              <a:spcBef>
-                <a:spcPts val="200"/>
-              </a:spcBef>
+              <a:lnSpc>
+                <a:spcPct val="112000"/>
+              </a:lnSpc>
               <a:spcAft>
-                <a:spcPts val="1000"/>
+                <a:spcPts val="1200"/>
               </a:spcAft>
               <a:buChar char="•"/>
             </a:pPr>
             <a:r>
-              <a:rPr sz="1700" b="0" i="0">
-                <a:solidFill>
-                  <a:srgbClr val="1F2937"/>
-                </a:solidFill>
+              <a:rPr sz="1600" b="0" i="0">
+                <a:solidFill>
+                  <a:srgbClr val="0B2A44"/>
+                </a:solidFill>
+                <a:latin typeface="Noto Sans"/>
               </a:rPr>
               <a:t>DKI Jakarta Rp78.792/kg, +5.7% terhadap rata-rata nasional.</a:t>
             </a:r>
           </a:p>
           <a:p>
             <a:pPr marL="171450" indent="-171450">
-              <a:spcBef>
-                <a:spcPts val="200"/>
-              </a:spcBef>
+              <a:lnSpc>
+                <a:spcPct val="112000"/>
+              </a:lnSpc>
               <a:spcAft>
-                <a:spcPts val="1000"/>
+                <a:spcPts val="1200"/>
               </a:spcAft>
               <a:buChar char="•"/>
             </a:pPr>
             <a:r>
-              <a:rPr sz="1700" b="0" i="0">
-                <a:solidFill>
-                  <a:srgbClr val="1F2937"/>
-                </a:solidFill>
+              <a:rPr sz="1600" b="0" i="0">
+                <a:solidFill>
+                  <a:srgbClr val="0B2A44"/>
+                </a:solidFill>
+                <a:latin typeface="Noto Sans"/>
               </a:rPr>
               <a:t>Harga di provinsi timur dan kepulauan cenderung lebih mahal: biaya logistik dan rantai pasok yang lebih panjang.</a:t>
+            </a:r>
+          </a:p>
+        </p:txBody>
+      </p:sp>
+      <p:sp>
+        <p:nvSpPr>
+          <p:cNvPr id="5" name="Rectangle 4"/>
+          <p:cNvSpPr/>
+          <p:nvPr/>
+        </p:nvSpPr>
+        <p:spPr>
+          <a:xfrm>
+            <a:off x="640080" y="4754880"/>
+            <a:ext cx="4937760" cy="914400"/>
+          </a:xfrm>
+          <a:prstGeom prst="rect">
+            <a:avLst/>
+          </a:prstGeom>
+          <a:solidFill>
+            <a:srgbClr val="F5C542"/>
+          </a:solidFill>
+          <a:ln>
+            <a:noFill/>
+          </a:ln>
+          <a:effectLst/>
+        </p:spPr>
+        <p:style>
+          <a:lnRef idx="1">
+            <a:schemeClr val="accent1"/>
+          </a:lnRef>
+          <a:fillRef idx="3">
+            <a:schemeClr val="accent1"/>
+          </a:fillRef>
+          <a:effectRef idx="2">
+            <a:schemeClr val="accent1"/>
+          </a:effectRef>
+          <a:fontRef idx="minor">
+            <a:schemeClr val="lt1"/>
+          </a:fontRef>
+        </p:style>
+        <p:txBody>
+          <a:bodyPr rtlCol="0" anchor="ctr"/>
+          <a:lstStyle/>
+          <a:p>
+            <a:pPr algn="ctr"/>
+          </a:p>
+        </p:txBody>
+      </p:sp>
+      <p:sp>
+        <p:nvSpPr>
+          <p:cNvPr id="6" name="TextBox 5"/>
+          <p:cNvSpPr txBox="1"/>
+          <p:nvPr/>
+        </p:nvSpPr>
+        <p:spPr>
+          <a:xfrm>
+            <a:off x="914400" y="4956048"/>
+            <a:ext cx="4434840" cy="548640"/>
+          </a:xfrm>
+          <a:prstGeom prst="rect">
+            <a:avLst/>
+          </a:prstGeom>
+          <a:noFill/>
+        </p:spPr>
+        <p:txBody>
+          <a:bodyPr wrap="square" lIns="0" rIns="0" tIns="0" bIns="0">
+            <a:spAutoFit/>
+          </a:bodyPr>
+          <a:lstStyle/>
+          <a:p>
+            <a:pPr>
+              <a:lnSpc>
+                <a:spcPct val="112000"/>
+              </a:lnSpc>
+              <a:spcAft>
+                <a:spcPts val="800"/>
+              </a:spcAft>
+            </a:pPr>
+            <a:r>
+              <a:rPr sz="1500" b="1" i="0">
+                <a:solidFill>
+                  <a:srgbClr val="0B2A44"/>
+                </a:solidFill>
+                <a:latin typeface="Noto Sans"/>
+              </a:rPr>
+              <a:t>Selisih termahal-termurah Rawit Merah: 143.5%</a:t>
             </a:r>
           </a:p>
         </p:txBody>
       </p:sp>
       <p:pic>
         <p:nvPicPr>
-          <p:cNvPr id="5" name="Picture 4" descr="06_provinsi_termahal.png"/>
+          <p:cNvPr id="7" name="Picture 6" descr="06_provinsi_termahal.png"/>
           <p:cNvPicPr>
             <a:picLocks noChangeAspect="1"/>
           </p:cNvPicPr>
@@ -4821,8 +6070,8 @@
         </p:blipFill>
         <p:spPr>
           <a:xfrm>
-            <a:off x="6217920" y="1371600"/>
-            <a:ext cx="5303520" cy="2916936"/>
+            <a:off x="5806440" y="1417320"/>
+            <a:ext cx="5897880" cy="3243834"/>
           </a:xfrm>
           <a:prstGeom prst="rect">
             <a:avLst/>
@@ -4843,7 +6092,7 @@
     <p:bg>
       <p:bgPr>
         <a:solidFill>
-          <a:srgbClr val="FFFFFF"/>
+          <a:srgbClr val="F7F4EE"/>
         </a:solidFill>
         <a:effectLst/>
       </p:bgPr>
@@ -4863,8 +6112,8 @@
         </p:nvSpPr>
         <p:spPr>
           <a:xfrm>
-            <a:off x="640080" y="274320"/>
-            <a:ext cx="10881360" cy="822960"/>
+            <a:off x="640080" y="292608"/>
+            <a:ext cx="10908792" cy="777240"/>
           </a:xfrm>
           <a:prstGeom prst="rect">
             <a:avLst/>
@@ -4872,7 +6121,7 @@
           <a:noFill/>
         </p:spPr>
         <p:txBody>
-          <a:bodyPr wrap="square">
+          <a:bodyPr wrap="square" lIns="0" rIns="0" tIns="0" bIns="0">
             <a:spAutoFit/>
           </a:bodyPr>
           <a:lstStyle/>
@@ -4883,10 +6132,11 @@
               </a:spcAft>
             </a:pPr>
             <a:r>
-              <a:rPr sz="3000" b="1" i="0">
-                <a:solidFill>
-                  <a:srgbClr val="1E3A8A"/>
-                </a:solidFill>
+              <a:rPr sz="3100" b="1" i="0">
+                <a:solidFill>
+                  <a:srgbClr val="0B2A44"/>
+                </a:solidFill>
+                <a:latin typeface="Liberation Serif"/>
               </a:rPr>
               <a:t>Paket Dashboard Power BI</a:t>
             </a:r>
@@ -4901,18 +6151,19 @@
         </p:nvSpPr>
         <p:spPr>
           <a:xfrm>
-            <a:off x="640080" y="1051560"/>
-            <a:ext cx="1371600" cy="54864"/>
+            <a:off x="658368" y="1060704"/>
+            <a:ext cx="2103120" cy="50292"/>
           </a:xfrm>
           <a:prstGeom prst="rect">
             <a:avLst/>
           </a:prstGeom>
           <a:solidFill>
-            <a:srgbClr val="0D9488"/>
+            <a:srgbClr val="E5322D"/>
           </a:solidFill>
           <a:ln>
             <a:noFill/>
           </a:ln>
+          <a:effectLst/>
         </p:spPr>
         <p:style>
           <a:lnRef idx="1">
@@ -4938,14 +6189,58 @@
       </p:sp>
       <p:sp>
         <p:nvSpPr>
-          <p:cNvPr id="4" name="TextBox 3"/>
+          <p:cNvPr id="4" name="Rectangle 3"/>
+          <p:cNvSpPr/>
+          <p:nvPr/>
+        </p:nvSpPr>
+        <p:spPr>
+          <a:xfrm>
+            <a:off x="640080" y="1371600"/>
+            <a:ext cx="6675120" cy="2240280"/>
+          </a:xfrm>
+          <a:prstGeom prst="rect">
+            <a:avLst/>
+          </a:prstGeom>
+          <a:solidFill>
+            <a:srgbClr val="0E4D7A"/>
+          </a:solidFill>
+          <a:ln>
+            <a:noFill/>
+          </a:ln>
+          <a:effectLst/>
+        </p:spPr>
+        <p:style>
+          <a:lnRef idx="1">
+            <a:schemeClr val="accent1"/>
+          </a:lnRef>
+          <a:fillRef idx="3">
+            <a:schemeClr val="accent1"/>
+          </a:fillRef>
+          <a:effectRef idx="2">
+            <a:schemeClr val="accent1"/>
+          </a:effectRef>
+          <a:fontRef idx="minor">
+            <a:schemeClr val="lt1"/>
+          </a:fontRef>
+        </p:style>
+        <p:txBody>
+          <a:bodyPr rtlCol="0" anchor="ctr"/>
+          <a:lstStyle/>
+          <a:p>
+            <a:pPr algn="ctr"/>
+          </a:p>
+        </p:txBody>
+      </p:sp>
+      <p:sp>
+        <p:nvSpPr>
+          <p:cNvPr id="5" name="TextBox 4"/>
           <p:cNvSpPr txBox="1"/>
           <p:nvPr/>
         </p:nvSpPr>
         <p:spPr>
           <a:xfrm>
-            <a:off x="640080" y="1371600"/>
-            <a:ext cx="10881360" cy="4754880"/>
+            <a:off x="914400" y="1627632"/>
+            <a:ext cx="6126480" cy="1783080"/>
           </a:xfrm>
           <a:prstGeom prst="rect">
             <a:avLst/>
@@ -4953,84 +6248,287 @@
           <a:noFill/>
         </p:spPr>
         <p:txBody>
-          <a:bodyPr wrap="square">
+          <a:bodyPr wrap="square" lIns="0" rIns="0" tIns="0" bIns="0">
             <a:spAutoFit/>
           </a:bodyPr>
           <a:lstStyle/>
           <a:p>
-            <a:pPr marL="171450" indent="-171450">
-              <a:spcBef>
-                <a:spcPts val="200"/>
-              </a:spcBef>
+            <a:pPr>
+              <a:lnSpc>
+                <a:spcPct val="118000"/>
+              </a:lnSpc>
               <a:spcAft>
-                <a:spcPts val="1000"/>
+                <a:spcPts val="800"/>
               </a:spcAft>
-              <a:buChar char="•"/>
             </a:pPr>
             <a:r>
-              <a:rPr sz="1700" b="0" i="0">
-                <a:solidFill>
-                  <a:srgbClr val="1F2937"/>
-                </a:solidFill>
+              <a:rPr sz="1550" b="0" i="0">
+                <a:solidFill>
+                  <a:srgbClr val="FFFFFF"/>
+                </a:solidFill>
+                <a:latin typeface="Noto Sans"/>
               </a:rPr>
               <a:t>Star schema siap import: fact_harga_cabai + dim_komoditas + dim_wilayah + dim_tanggal.</a:t>
             </a:r>
           </a:p>
-          <a:p>
-            <a:pPr marL="171450" indent="-171450">
-              <a:spcBef>
-                <a:spcPts val="200"/>
-              </a:spcBef>
+        </p:txBody>
+      </p:sp>
+      <p:sp>
+        <p:nvSpPr>
+          <p:cNvPr id="6" name="Rectangle 5"/>
+          <p:cNvSpPr/>
+          <p:nvPr/>
+        </p:nvSpPr>
+        <p:spPr>
+          <a:xfrm>
+            <a:off x="7543800" y="1371600"/>
+            <a:ext cx="4005072" cy="2240280"/>
+          </a:xfrm>
+          <a:prstGeom prst="rect">
+            <a:avLst/>
+          </a:prstGeom>
+          <a:solidFill>
+            <a:srgbClr val="F5C542"/>
+          </a:solidFill>
+          <a:ln>
+            <a:noFill/>
+          </a:ln>
+          <a:effectLst/>
+        </p:spPr>
+        <p:style>
+          <a:lnRef idx="1">
+            <a:schemeClr val="accent1"/>
+          </a:lnRef>
+          <a:fillRef idx="3">
+            <a:schemeClr val="accent1"/>
+          </a:fillRef>
+          <a:effectRef idx="2">
+            <a:schemeClr val="accent1"/>
+          </a:effectRef>
+          <a:fontRef idx="minor">
+            <a:schemeClr val="lt1"/>
+          </a:fontRef>
+        </p:style>
+        <p:txBody>
+          <a:bodyPr rtlCol="0" anchor="ctr"/>
+          <a:lstStyle/>
+          <a:p>
+            <a:pPr algn="ctr"/>
+          </a:p>
+        </p:txBody>
+      </p:sp>
+      <p:sp>
+        <p:nvSpPr>
+          <p:cNvPr id="7" name="TextBox 6"/>
+          <p:cNvSpPr txBox="1"/>
+          <p:nvPr/>
+        </p:nvSpPr>
+        <p:spPr>
+          <a:xfrm>
+            <a:off x="7818120" y="1627632"/>
+            <a:ext cx="3456432" cy="1783080"/>
+          </a:xfrm>
+          <a:prstGeom prst="rect">
+            <a:avLst/>
+          </a:prstGeom>
+          <a:noFill/>
+        </p:spPr>
+        <p:txBody>
+          <a:bodyPr wrap="square" lIns="0" rIns="0" tIns="0" bIns="0">
+            <a:spAutoFit/>
+          </a:bodyPr>
+          <a:lstStyle/>
+          <a:p>
+            <a:pPr>
+              <a:lnSpc>
+                <a:spcPct val="118000"/>
+              </a:lnSpc>
               <a:spcAft>
-                <a:spcPts val="1000"/>
+                <a:spcPts val="800"/>
               </a:spcAft>
-              <a:buChar char="•"/>
             </a:pPr>
             <a:r>
-              <a:rPr sz="1700" b="0" i="0">
-                <a:solidFill>
-                  <a:srgbClr val="1F2937"/>
-                </a:solidFill>
+              <a:rPr sz="1550" b="0" i="0">
+                <a:solidFill>
+                  <a:srgbClr val="0B2A44"/>
+                </a:solidFill>
+                <a:latin typeface="Noto Sans"/>
+              </a:rPr>
+              <a:t>Layout 4 halaman: Overview, Per Komoditas, Per Wilayah, Volatilitas - lengkap dengan spesifikasi tiap visual.</a:t>
+            </a:r>
+          </a:p>
+        </p:txBody>
+      </p:sp>
+      <p:sp>
+        <p:nvSpPr>
+          <p:cNvPr id="8" name="Rectangle 7"/>
+          <p:cNvSpPr/>
+          <p:nvPr/>
+        </p:nvSpPr>
+        <p:spPr>
+          <a:xfrm>
+            <a:off x="640080" y="3794760"/>
+            <a:ext cx="4005072" cy="2377440"/>
+          </a:xfrm>
+          <a:prstGeom prst="rect">
+            <a:avLst/>
+          </a:prstGeom>
+          <a:solidFill>
+            <a:srgbClr val="E5322D"/>
+          </a:solidFill>
+          <a:ln>
+            <a:noFill/>
+          </a:ln>
+          <a:effectLst/>
+        </p:spPr>
+        <p:style>
+          <a:lnRef idx="1">
+            <a:schemeClr val="accent1"/>
+          </a:lnRef>
+          <a:fillRef idx="3">
+            <a:schemeClr val="accent1"/>
+          </a:fillRef>
+          <a:effectRef idx="2">
+            <a:schemeClr val="accent1"/>
+          </a:effectRef>
+          <a:fontRef idx="minor">
+            <a:schemeClr val="lt1"/>
+          </a:fontRef>
+        </p:style>
+        <p:txBody>
+          <a:bodyPr rtlCol="0" anchor="ctr"/>
+          <a:lstStyle/>
+          <a:p>
+            <a:pPr algn="ctr"/>
+          </a:p>
+        </p:txBody>
+      </p:sp>
+      <p:sp>
+        <p:nvSpPr>
+          <p:cNvPr id="9" name="TextBox 8"/>
+          <p:cNvSpPr txBox="1"/>
+          <p:nvPr/>
+        </p:nvSpPr>
+        <p:spPr>
+          <a:xfrm>
+            <a:off x="914400" y="4050792"/>
+            <a:ext cx="3456432" cy="1920240"/>
+          </a:xfrm>
+          <a:prstGeom prst="rect">
+            <a:avLst/>
+          </a:prstGeom>
+          <a:noFill/>
+        </p:spPr>
+        <p:txBody>
+          <a:bodyPr wrap="square" lIns="0" rIns="0" tIns="0" bIns="0">
+            <a:spAutoFit/>
+          </a:bodyPr>
+          <a:lstStyle/>
+          <a:p>
+            <a:pPr>
+              <a:lnSpc>
+                <a:spcPct val="118000"/>
+              </a:lnSpc>
+              <a:spcAft>
+                <a:spcPts val="800"/>
+              </a:spcAft>
+            </a:pPr>
+            <a:r>
+              <a:rPr sz="1550" b="0" i="0">
+                <a:solidFill>
+                  <a:srgbClr val="FFFFFF"/>
+                </a:solidFill>
+                <a:latin typeface="Noto Sans"/>
+              </a:rPr>
+              <a:t>Panduan rakit langkah demi langkah untuk Power BI Desktop di Windows: import, relasi, mark date table, tempel DAX, bangun visual, publish.</a:t>
+            </a:r>
+          </a:p>
+        </p:txBody>
+      </p:sp>
+      <p:sp>
+        <p:nvSpPr>
+          <p:cNvPr id="10" name="Rectangle 9"/>
+          <p:cNvSpPr/>
+          <p:nvPr/>
+        </p:nvSpPr>
+        <p:spPr>
+          <a:xfrm>
+            <a:off x="4873752" y="3794760"/>
+            <a:ext cx="6675120" cy="2377440"/>
+          </a:xfrm>
+          <a:prstGeom prst="rect">
+            <a:avLst/>
+          </a:prstGeom>
+          <a:solidFill>
+            <a:srgbClr val="F7F4EE"/>
+          </a:solidFill>
+          <a:ln w="15875">
+            <a:solidFill>
+              <a:srgbClr val="0E4D7A"/>
+            </a:solidFill>
+          </a:ln>
+          <a:effectLst/>
+        </p:spPr>
+        <p:style>
+          <a:lnRef idx="1">
+            <a:schemeClr val="accent1"/>
+          </a:lnRef>
+          <a:fillRef idx="3">
+            <a:schemeClr val="accent1"/>
+          </a:fillRef>
+          <a:effectRef idx="2">
+            <a:schemeClr val="accent1"/>
+          </a:effectRef>
+          <a:fontRef idx="minor">
+            <a:schemeClr val="lt1"/>
+          </a:fontRef>
+        </p:style>
+        <p:txBody>
+          <a:bodyPr rtlCol="0" anchor="ctr"/>
+          <a:lstStyle/>
+          <a:p>
+            <a:pPr algn="ctr"/>
+          </a:p>
+        </p:txBody>
+      </p:sp>
+      <p:sp>
+        <p:nvSpPr>
+          <p:cNvPr id="11" name="TextBox 10"/>
+          <p:cNvSpPr txBox="1"/>
+          <p:nvPr/>
+        </p:nvSpPr>
+        <p:spPr>
+          <a:xfrm>
+            <a:off x="5148072" y="4050792"/>
+            <a:ext cx="6126480" cy="1920240"/>
+          </a:xfrm>
+          <a:prstGeom prst="rect">
+            <a:avLst/>
+          </a:prstGeom>
+          <a:noFill/>
+        </p:spPr>
+        <p:txBody>
+          <a:bodyPr wrap="square" lIns="0" rIns="0" tIns="0" bIns="0">
+            <a:spAutoFit/>
+          </a:bodyPr>
+          <a:lstStyle/>
+          <a:p>
+            <a:pPr>
+              <a:lnSpc>
+                <a:spcPct val="118000"/>
+              </a:lnSpc>
+              <a:spcAft>
+                <a:spcPts val="800"/>
+              </a:spcAft>
+            </a:pPr>
+            <a:r>
+              <a:rPr sz="1550" b="0" i="0">
+                <a:solidFill>
+                  <a:srgbClr val="0B2A44"/>
+                </a:solidFill>
+                <a:latin typeface="Noto Sans"/>
               </a:rPr>
               <a:t>15 measure DAX siap tempel: rata-rata, MoM %, YoY %, MA 7 hari, volatilitas (CV %), peringkat provinsi, selisih vs nasional.</a:t>
-            </a:r>
-          </a:p>
-          <a:p>
-            <a:pPr marL="171450" indent="-171450">
-              <a:spcBef>
-                <a:spcPts val="200"/>
-              </a:spcBef>
-              <a:spcAft>
-                <a:spcPts val="1000"/>
-              </a:spcAft>
-              <a:buChar char="•"/>
-            </a:pPr>
-            <a:r>
-              <a:rPr sz="1700" b="0" i="0">
-                <a:solidFill>
-                  <a:srgbClr val="1F2937"/>
-                </a:solidFill>
-              </a:rPr>
-              <a:t>Layout 4 halaman: Overview, Per Komoditas, Per Wilayah, Volatilitas — lengkap dengan spesifikasi tiap visual.</a:t>
-            </a:r>
-          </a:p>
-          <a:p>
-            <a:pPr marL="171450" indent="-171450">
-              <a:spcBef>
-                <a:spcPts val="200"/>
-              </a:spcBef>
-              <a:spcAft>
-                <a:spcPts val="1000"/>
-              </a:spcAft>
-              <a:buChar char="•"/>
-            </a:pPr>
-            <a:r>
-              <a:rPr sz="1700" b="0" i="0">
-                <a:solidFill>
-                  <a:srgbClr val="1F2937"/>
-                </a:solidFill>
-              </a:rPr>
-              <a:t>Panduan rakit langkah demi langkah untuk Power BI Desktop di Windows: import, relasi, mark date table, tempel DAX, bangun visual, publish.</a:t>
             </a:r>
           </a:p>
         </p:txBody>
@@ -5049,7 +6547,7 @@
     <p:bg>
       <p:bgPr>
         <a:solidFill>
-          <a:srgbClr val="FFFFFF"/>
+          <a:srgbClr val="F7F4EE"/>
         </a:solidFill>
         <a:effectLst/>
       </p:bgPr>
@@ -5069,8 +6567,8 @@
         </p:nvSpPr>
         <p:spPr>
           <a:xfrm>
-            <a:off x="640080" y="274320"/>
-            <a:ext cx="10881360" cy="822960"/>
+            <a:off x="640080" y="292608"/>
+            <a:ext cx="10908792" cy="777240"/>
           </a:xfrm>
           <a:prstGeom prst="rect">
             <a:avLst/>
@@ -5078,7 +6576,7 @@
           <a:noFill/>
         </p:spPr>
         <p:txBody>
-          <a:bodyPr wrap="square">
+          <a:bodyPr wrap="square" lIns="0" rIns="0" tIns="0" bIns="0">
             <a:spAutoFit/>
           </a:bodyPr>
           <a:lstStyle/>
@@ -5089,10 +6587,11 @@
               </a:spcAft>
             </a:pPr>
             <a:r>
-              <a:rPr sz="3000" b="1" i="0">
-                <a:solidFill>
-                  <a:srgbClr val="1E3A8A"/>
-                </a:solidFill>
+              <a:rPr sz="3100" b="1" i="0">
+                <a:solidFill>
+                  <a:srgbClr val="0B2A44"/>
+                </a:solidFill>
+                <a:latin typeface="Liberation Serif"/>
               </a:rPr>
               <a:t>Insight dan Rekomendasi</a:t>
             </a:r>
@@ -5107,18 +6606,19 @@
         </p:nvSpPr>
         <p:spPr>
           <a:xfrm>
-            <a:off x="640080" y="1051560"/>
-            <a:ext cx="1371600" cy="54864"/>
+            <a:off x="658368" y="1060704"/>
+            <a:ext cx="2103120" cy="50292"/>
           </a:xfrm>
           <a:prstGeom prst="rect">
             <a:avLst/>
           </a:prstGeom>
           <a:solidFill>
-            <a:srgbClr val="0D9488"/>
+            <a:srgbClr val="E5322D"/>
           </a:solidFill>
           <a:ln>
             <a:noFill/>
           </a:ln>
+          <a:effectLst/>
         </p:spPr>
         <p:style>
           <a:lnRef idx="1">
@@ -5144,14 +6644,58 @@
       </p:sp>
       <p:sp>
         <p:nvSpPr>
-          <p:cNvPr id="4" name="TextBox 3"/>
+          <p:cNvPr id="4" name="Rectangle 3"/>
+          <p:cNvSpPr/>
+          <p:nvPr/>
+        </p:nvSpPr>
+        <p:spPr>
+          <a:xfrm>
+            <a:off x="640080" y="1417320"/>
+            <a:ext cx="82296" cy="4709160"/>
+          </a:xfrm>
+          <a:prstGeom prst="rect">
+            <a:avLst/>
+          </a:prstGeom>
+          <a:solidFill>
+            <a:srgbClr val="E5322D"/>
+          </a:solidFill>
+          <a:ln>
+            <a:noFill/>
+          </a:ln>
+          <a:effectLst/>
+        </p:spPr>
+        <p:style>
+          <a:lnRef idx="1">
+            <a:schemeClr val="accent1"/>
+          </a:lnRef>
+          <a:fillRef idx="3">
+            <a:schemeClr val="accent1"/>
+          </a:fillRef>
+          <a:effectRef idx="2">
+            <a:schemeClr val="accent1"/>
+          </a:effectRef>
+          <a:fontRef idx="minor">
+            <a:schemeClr val="lt1"/>
+          </a:fontRef>
+        </p:style>
+        <p:txBody>
+          <a:bodyPr rtlCol="0" anchor="ctr"/>
+          <a:lstStyle/>
+          <a:p>
+            <a:pPr algn="ctr"/>
+          </a:p>
+        </p:txBody>
+      </p:sp>
+      <p:sp>
+        <p:nvSpPr>
+          <p:cNvPr id="5" name="TextBox 4"/>
           <p:cNvSpPr txBox="1"/>
           <p:nvPr/>
         </p:nvSpPr>
         <p:spPr>
           <a:xfrm>
-            <a:off x="640080" y="1371600"/>
-            <a:ext cx="10881360" cy="4754880"/>
+            <a:off x="1005840" y="1463040"/>
+            <a:ext cx="10561320" cy="4754880"/>
           </a:xfrm>
           <a:prstGeom prst="rect">
             <a:avLst/>
@@ -5159,84 +6703,120 @@
           <a:noFill/>
         </p:spPr>
         <p:txBody>
-          <a:bodyPr wrap="square">
+          <a:bodyPr wrap="square" lIns="0" rIns="0" tIns="0" bIns="0">
             <a:spAutoFit/>
           </a:bodyPr>
           <a:lstStyle/>
           <a:p>
-            <a:pPr marL="171450" indent="-171450">
-              <a:spcBef>
-                <a:spcPts val="200"/>
-              </a:spcBef>
+            <a:pPr>
+              <a:lnSpc>
+                <a:spcPct val="115000"/>
+              </a:lnSpc>
               <a:spcAft>
-                <a:spcPts val="1000"/>
+                <a:spcPts val="2000"/>
               </a:spcAft>
-              <a:buChar char="•"/>
             </a:pPr>
             <a:r>
-              <a:rPr sz="1700" b="0" i="0">
-                <a:solidFill>
-                  <a:srgbClr val="1F2937"/>
-                </a:solidFill>
-              </a:rPr>
-              <a:t>1. Pantau Rawit Merah (paling mahal, rata-rata 2026 Rp74.530/kg) dan Keriting (paling volatile, CV 20.0%).</a:t>
-            </a:r>
-          </a:p>
-          <a:p>
-            <a:pPr marL="171450" indent="-171450">
-              <a:spcBef>
-                <a:spcPts val="200"/>
-              </a:spcBef>
+              <a:rPr sz="1700" b="1">
+                <a:solidFill>
+                  <a:srgbClr val="E5322D"/>
+                </a:solidFill>
+                <a:latin typeface="Noto Sans"/>
+              </a:rPr>
+              <a:t>1.  </a:t>
+            </a:r>
+            <a:r>
+              <a:rPr sz="1650">
+                <a:solidFill>
+                  <a:srgbClr val="0B2A44"/>
+                </a:solidFill>
+                <a:latin typeface="Noto Sans"/>
+              </a:rPr>
+              <a:t>Pantau Rawit Merah (paling mahal, rata-rata 2026 Rp74.530/kg) dan Keriting (paling volatile, CV 20.0%).</a:t>
+            </a:r>
+          </a:p>
+          <a:p>
+            <a:pPr>
+              <a:lnSpc>
+                <a:spcPct val="115000"/>
+              </a:lnSpc>
               <a:spcAft>
-                <a:spcPts val="1000"/>
+                <a:spcPts val="2000"/>
               </a:spcAft>
-              <a:buChar char="•"/>
             </a:pPr>
             <a:r>
-              <a:rPr sz="1700" b="0" i="0">
-                <a:solidFill>
-                  <a:srgbClr val="1F2937"/>
-                </a:solidFill>
-              </a:rPr>
-              <a:t>2. Siapkan skenario lonjakan: lonjakan harian terbesar +20.4% (Cabai Merah Keriting, 2026-05-25) menunjukkan harga bisa melonjak dalam sehari.</a:t>
-            </a:r>
-          </a:p>
-          <a:p>
-            <a:pPr marL="171450" indent="-171450">
-              <a:spcBef>
-                <a:spcPts val="200"/>
-              </a:spcBef>
+              <a:rPr sz="1700" b="1">
+                <a:solidFill>
+                  <a:srgbClr val="E5322D"/>
+                </a:solidFill>
+                <a:latin typeface="Noto Sans"/>
+              </a:rPr>
+              <a:t>2.  </a:t>
+            </a:r>
+            <a:r>
+              <a:rPr sz="1650">
+                <a:solidFill>
+                  <a:srgbClr val="0B2A44"/>
+                </a:solidFill>
+                <a:latin typeface="Noto Sans"/>
+              </a:rPr>
+              <a:t>Siapkan skenario lonjakan: lonjakan harian terbesar +20.4% (Cabai Merah Keriting, 2026-05-25) menunjukkan harga bisa melonjak dalam sehari.</a:t>
+            </a:r>
+          </a:p>
+          <a:p>
+            <a:pPr>
+              <a:lnSpc>
+                <a:spcPct val="115000"/>
+              </a:lnSpc>
               <a:spcAft>
-                <a:spcPts val="1000"/>
+                <a:spcPts val="2000"/>
               </a:spcAft>
-              <a:buChar char="•"/>
             </a:pPr>
             <a:r>
-              <a:rPr sz="1700" b="0" i="0">
-                <a:solidFill>
-                  <a:srgbClr val="1F2937"/>
-                </a:solidFill>
-              </a:rPr>
-              <a:t>3. Fokus ke provinsi timur: disparitas harga antar provinsi mencapai puluhan persen — distribusi dan logistik adalah bagian dari masalah.</a:t>
-            </a:r>
-          </a:p>
-          <a:p>
-            <a:pPr marL="171450" indent="-171450">
-              <a:spcBef>
-                <a:spcPts val="200"/>
-              </a:spcBef>
+              <a:rPr sz="1700" b="1">
+                <a:solidFill>
+                  <a:srgbClr val="E5322D"/>
+                </a:solidFill>
+                <a:latin typeface="Noto Sans"/>
+              </a:rPr>
+              <a:t>3.  </a:t>
+            </a:r>
+            <a:r>
+              <a:rPr sz="1650">
+                <a:solidFill>
+                  <a:srgbClr val="0B2A44"/>
+                </a:solidFill>
+                <a:latin typeface="Noto Sans"/>
+              </a:rPr>
+              <a:t>Fokus ke provinsi timur: disparitas harga antar provinsi mencapai puluhan persen - distribusi dan logistik adalah bagian dari masalah.</a:t>
+            </a:r>
+          </a:p>
+          <a:p>
+            <a:pPr>
+              <a:lnSpc>
+                <a:spcPct val="115000"/>
+              </a:lnSpc>
               <a:spcAft>
-                <a:spcPts val="1000"/>
+                <a:spcPts val="2000"/>
               </a:spcAft>
-              <a:buChar char="•"/>
             </a:pPr>
             <a:r>
-              <a:rPr sz="1700" b="0" i="0">
-                <a:solidFill>
-                  <a:srgbClr val="1F2937"/>
-                </a:solidFill>
-              </a:rPr>
-              <a:t>4. Gunakan dashboard Power BI untuk pemantauan harian: MA 7 hari dan MoM % memberi sinyal lebih awal daripada harga harian mentah.</a:t>
+              <a:rPr sz="1700" b="1">
+                <a:solidFill>
+                  <a:srgbClr val="E5322D"/>
+                </a:solidFill>
+                <a:latin typeface="Noto Sans"/>
+              </a:rPr>
+              <a:t>4.  </a:t>
+            </a:r>
+            <a:r>
+              <a:rPr sz="1650">
+                <a:solidFill>
+                  <a:srgbClr val="0B2A44"/>
+                </a:solidFill>
+                <a:latin typeface="Noto Sans"/>
+              </a:rPr>
+              <a:t>Gunakan dashboard Power BI untuk pemantauan harian: MA 7 hari dan MoM % memberi sinyal lebih awal daripada harga harian mentah.</a:t>
             </a:r>
           </a:p>
         </p:txBody>

--- a/Portofolio-Analisis-Harga-Cabai.pptx
+++ b/Portofolio-Analisis-Harga-Cabai.pptx
@@ -3523,7 +3523,7 @@
                 </a:solidFill>
                 <a:latin typeface="Noto Sans"/>
               </a:rPr>
-              <a:t>PUNCAK CABAI RAWIT MERAH - 12 OKTOBER 2026</a:t>
+              <a:t>PUNCAK CABAI RAWIT MERAH - 20 OKTOBER 2026</a:t>
             </a:r>
           </a:p>
         </p:txBody>
@@ -3557,7 +3557,7 @@
                 </a:solidFill>
                 <a:latin typeface="Noto Sans"/>
               </a:rPr>
-              <a:t>Rp105.300</a:t>
+              <a:t>Rp105.450</a:t>
             </a:r>
             <a:r>
               <a:rPr sz="2000" b="1">
@@ -4507,7 +4507,7 @@
                 </a:solidFill>
                 <a:latin typeface="Noto Sans"/>
               </a:rPr>
-              <a:t>Data harian API PIHPS: 2025-01-01 sampai 2026-10-16, 1,872 baris nasional + 59,436 baris provinsi (58,253 dengan harga).</a:t>
+              <a:t>Data harian API PIHPS: 2025-01-01 sampai 2026-10-23, 1,892 baris nasional + 60,061 baris provinsi (58,874 dengan harga).</a:t>
             </a:r>
           </a:p>
           <a:p>
@@ -4650,7 +4650,7 @@
                 </a:solidFill>
                 <a:latin typeface="Noto Sans"/>
               </a:rPr>
-              <a:t>1,872</a:t>
+              <a:t>1,892</a:t>
             </a:r>
           </a:p>
           <a:p>
@@ -4682,7 +4682,7 @@
                 </a:solidFill>
                 <a:latin typeface="Noto Sans"/>
               </a:rPr>
-              <a:t>59,436</a:t>
+              <a:t>60,061</a:t>
             </a:r>
           </a:p>
           <a:p>
@@ -4714,7 +4714,7 @@
                 </a:solidFill>
                 <a:latin typeface="Noto Sans"/>
               </a:rPr>
-              <a:t>58,253</a:t>
+              <a:t>58,874</a:t>
             </a:r>
           </a:p>
           <a:p>
@@ -4914,7 +4914,7 @@
                 </a:solidFill>
                 <a:latin typeface="Noto Sans"/>
               </a:rPr>
-              <a:t>Rata-rata nasional 2026 tertinggi: Cabai Rawit Merah Rp74.530/kg, naik 13.3% dibanding 2025.</a:t>
+              <a:t>Rata-rata nasional 2026 tertinggi: Cabai Rawit Merah Rp75.219/kg, naik 14.3% dibanding 2025.</a:t>
             </a:r>
           </a:p>
           <a:p>
@@ -4934,7 +4934,7 @@
                 </a:solidFill>
                 <a:latin typeface="Noto Sans"/>
               </a:rPr>
-              <a:t>Cabai Merah Besar rata-rata Rp51.706/kg (-2.9% vs 2025); Keriting Rp53.277/kg (-4.2%); Rawit Hijau Rp56.578/kg (+10.7%).</a:t>
+              <a:t>Cabai Merah Besar rata-rata Rp52.267/kg (-1.9% vs 2025); Keriting Rp54.072/kg (-2.8%); Rawit Hijau Rp57.124/kg (+11.8%).</a:t>
             </a:r>
           </a:p>
           <a:p>
@@ -5064,7 +5064,7 @@
                 </a:solidFill>
                 <a:latin typeface="Noto Sans"/>
               </a:rPr>
-              <a:t>Cabai Rawit Merah rata-rata Rp74.530/kg di 2026, naik 13.3% dibanding 2025.</a:t>
+              <a:t>Cabai Rawit Merah rata-rata Rp75.219/kg di 2026, naik 14.3% dibanding 2025.</a:t>
             </a:r>
           </a:p>
         </p:txBody>
@@ -5256,7 +5256,7 @@
                 </a:solidFill>
                 <a:latin typeface="Noto Sans"/>
               </a:rPr>
-              <a:t>Dari akhir September (Rp100.550/kg) ke puncak Oktober (Rp105.300/kg pada 2026-10-12), naik 4.7%.</a:t>
+              <a:t>Dari akhir September (Rp100.550/kg) ke puncak Oktober (Rp105.450/kg pada 2026-10-20), naik 4.9%.</a:t>
             </a:r>
           </a:p>
           <a:p>
@@ -5276,7 +5276,7 @@
                 </a:solidFill>
                 <a:latin typeface="Noto Sans"/>
               </a:rPr>
-              <a:t>Kenaikan terbesar terjadi pada September: rata-rata bulanan naik +39.3% dibanding Agustus, lalu Oktober naik lagi +11.3%.</a:t>
+              <a:t>Kenaikan terbesar terjadi pada September: rata-rata bulanan naik +39.3% dibanding Agustus, lalu Oktober naik lagi +11.6%.</a:t>
             </a:r>
           </a:p>
           <a:p>
@@ -5398,7 +5398,7 @@
                 </a:solidFill>
                 <a:latin typeface="Noto Sans"/>
               </a:rPr>
-              <a:t>Rp105.300</a:t>
+              <a:t>Rp105.450</a:t>
             </a:r>
             <a:r>
               <a:rPr sz="1600" b="1">
@@ -5449,7 +5449,7 @@
                 </a:solidFill>
                 <a:latin typeface="Noto Sans"/>
               </a:rPr>
-              <a:t>Puncak 2026-10-12 - naik 4.7% dari akhir September (Rp100.550/kg).</a:t>
+              <a:t>Puncak 2026-10-20 - naik 4.9% dari akhir September (Rp100.550/kg).</a:t>
             </a:r>
           </a:p>
         </p:txBody>
@@ -5668,7 +5668,7 @@
                 </a:solidFill>
                 <a:latin typeface="Noto Sans"/>
               </a:rPr>
-              <a:t>Paling volatile: Cabai Merah Keriting - CV 20.0%</a:t>
+              <a:t>Paling volatile: Cabai Merah Keriting - CV 21.7%</a:t>
             </a:r>
           </a:p>
         </p:txBody>
@@ -5711,7 +5711,7 @@
                 </a:solidFill>
                 <a:latin typeface="Noto Sans"/>
               </a:rPr>
-              <a:t>Cabai Merah Keriting paling volatile di 2026: koefisien variasi 20.0%, rentang Rp39.650/kg sampai Rp88.350/kg.</a:t>
+              <a:t>Cabai Merah Keriting paling volatile di 2026: koefisien variasi 21.7%, rentang Rp39.650/kg sampai Rp88.350/kg.</a:t>
             </a:r>
           </a:p>
           <a:p>
@@ -5731,7 +5731,7 @@
                 </a:solidFill>
                 <a:latin typeface="Noto Sans"/>
               </a:rPr>
-              <a:t>Yang paling stabil: Cabai Rawit Hijau (CV 12.3%).</a:t>
+              <a:t>Yang paling stabil: Cabai Rawit Hijau (CV 13.5%).</a:t>
             </a:r>
           </a:p>
           <a:p>
@@ -5923,7 +5923,7 @@
                 </a:solidFill>
                 <a:latin typeface="Noto Sans"/>
               </a:rPr>
-              <a:t>2026, Cabai Rawit Merah termahal di Maluku Utara (rata-rata Rp113.213/kg), termurah di Sumatera Utara (Rp46.494/kg) - selisih Rp66.719/kg (143.5%).</a:t>
+              <a:t>2026, Cabai Rawit Merah termahal di Maluku Utara (rata-rata Rp114.198/kg), termurah di Sumatera Utara (Rp46.920/kg) - selisih Rp67.278/kg (143.4%).</a:t>
             </a:r>
           </a:p>
           <a:p>
@@ -5943,7 +5943,7 @@
                 </a:solidFill>
                 <a:latin typeface="Noto Sans"/>
               </a:rPr>
-              <a:t>DKI Jakarta Rp78.792/kg, +5.7% terhadap rata-rata nasional.</a:t>
+              <a:t>DKI Jakarta Rp78.870/kg, +4.9% terhadap rata-rata nasional.</a:t>
             </a:r>
           </a:p>
           <a:p>
@@ -6049,7 +6049,7 @@
                 </a:solidFill>
                 <a:latin typeface="Noto Sans"/>
               </a:rPr>
-              <a:t>Selisih termahal-termurah Rawit Merah: 143.5%</a:t>
+              <a:t>Selisih termahal-termurah Rawit Merah: 143.4%</a:t>
             </a:r>
           </a:p>
         </p:txBody>
@@ -6732,7 +6732,7 @@
                 </a:solidFill>
                 <a:latin typeface="Noto Sans"/>
               </a:rPr>
-              <a:t>Pantau Rawit Merah (paling mahal, rata-rata 2026 Rp74.530/kg) dan Keriting (paling volatile, CV 20.0%).</a:t>
+              <a:t>Pantau Rawit Merah (paling mahal, rata-rata 2026 Rp75.219/kg) dan Keriting (paling volatile, CV 21.7%).</a:t>
             </a:r>
           </a:p>
           <a:p>
